--- a/exports/pptx/lessons/senior-module-01-what-is-iks/day-04-mathematics.pptx
+++ b/exports/pptx/lessons/senior-module-01-what-is-iks/day-04-mathematics.pptx
@@ -15,9 +15,12 @@
     <p:sldId id="263" r:id="rId9"/>
     <p:sldId id="264" r:id="rId10"/>
     <p:sldId id="265" r:id="rId11"/>
+    <p:sldId id="266" r:id="rId12"/>
+    <p:sldId id="267" r:id="rId13"/>
+    <p:sldId id="268" r:id="rId14"/>
   </p:sldIdLst>
   <p:notesMasterIdLst>
-    <p:notesMasterId r:id="rId12"/>
+    <p:notesMasterId r:id="rId15"/>
   </p:notesMasterIdLst>
   <p:sldSz cx="9144000" cy="5143500"/>
   <p:notesSz cx="5143500" cy="9144000"/>
@@ -623,6 +626,270 @@
             <a:fld id="{F7021451-1387-4CA6-816F-3879F97B5CBC}" type="slidenum">
               <a:rPr lang="en-US"/>
               <a:t>10</a:t>
+            </a:fld>
+            <a:endParaRPr lang="en-US"/>
+          </a:p>
+        </p:txBody>
+      </p:sp>
+    </p:spTree>
+    <p:extLst>
+      <p:ext uri="{BB962C8B-B14F-4D97-AF65-F5344CB8AC3E}">
+        <p14:creationId xmlns:p14="http://schemas.microsoft.com/office/powerpoint/2010/main" val="1024086991"/>
+      </p:ext>
+    </p:extLst>
+  </p:cSld>
+  <p:clrMapOvr>
+    <a:masterClrMapping/>
+  </p:clrMapOvr>
+</p:notes>
+</file>
+
+<file path=ppt/notesSlides/notesSlide11.xml><?xml version="1.0" encoding="utf-8"?>
+<p:notes xmlns:a="http://schemas.openxmlformats.org/drawingml/2006/main" xmlns:r="http://schemas.openxmlformats.org/officeDocument/2006/relationships" xmlns:p="http://schemas.openxmlformats.org/presentationml/2006/main">
+  <p:cSld>
+    <p:spTree>
+      <p:nvGrpSpPr>
+        <p:cNvPr id="1" name=""/>
+        <p:cNvGrpSpPr/>
+        <p:nvPr/>
+      </p:nvGrpSpPr>
+      <p:grpSpPr>
+        <a:xfrm>
+          <a:off x="0" y="0"/>
+          <a:ext cx="0" cy="0"/>
+          <a:chOff x="0" y="0"/>
+          <a:chExt cx="0" cy="0"/>
+        </a:xfrm>
+      </p:grpSpPr>
+      <p:sp>
+        <p:nvSpPr>
+          <p:cNvPr id="2" name="Slide Image Placeholder 1"/>
+          <p:cNvSpPr>
+            <a:spLocks noGrp="1" noRot="1" noChangeAspect="1"/>
+          </p:cNvSpPr>
+          <p:nvPr>
+            <p:ph type="sldImg"/>
+          </p:nvPr>
+        </p:nvSpPr>
+        <p:spPr/>
+      </p:sp>
+      <p:sp>
+        <p:nvSpPr>
+          <p:cNvPr id="3" name="Notes Placeholder 2"/>
+          <p:cNvSpPr>
+            <a:spLocks noGrp="1"/>
+          </p:cNvSpPr>
+          <p:nvPr>
+            <p:ph type="body" idx="1"/>
+          </p:nvPr>
+        </p:nvSpPr>
+        <p:spPr/>
+        <p:txBody>
+          <a:bodyPr/>
+          <a:lstStyle/>
+          <a:p>
+            <a:r>
+              <a:rPr lang="en-US" dirty="0"/>
+              <a:t/>
+            </a:r>
+            <a:endParaRPr lang="en-US" dirty="0"/>
+          </a:p>
+        </p:txBody>
+      </p:sp>
+      <p:sp>
+        <p:nvSpPr>
+          <p:cNvPr id="4" name="Slide Number Placeholder 3"/>
+          <p:cNvSpPr>
+            <a:spLocks noGrp="1"/>
+          </p:cNvSpPr>
+          <p:nvPr>
+            <p:ph type="sldNum" sz="quarter" idx="10"/>
+          </p:nvPr>
+        </p:nvSpPr>
+        <p:spPr/>
+        <p:txBody>
+          <a:bodyPr/>
+          <a:lstStyle/>
+          <a:p>
+            <a:fld id="{F7021451-1387-4CA6-816F-3879F97B5CBC}" type="slidenum">
+              <a:rPr lang="en-US"/>
+              <a:t>11</a:t>
+            </a:fld>
+            <a:endParaRPr lang="en-US"/>
+          </a:p>
+        </p:txBody>
+      </p:sp>
+    </p:spTree>
+    <p:extLst>
+      <p:ext uri="{BB962C8B-B14F-4D97-AF65-F5344CB8AC3E}">
+        <p14:creationId xmlns:p14="http://schemas.microsoft.com/office/powerpoint/2010/main" val="1024086991"/>
+      </p:ext>
+    </p:extLst>
+  </p:cSld>
+  <p:clrMapOvr>
+    <a:masterClrMapping/>
+  </p:clrMapOvr>
+</p:notes>
+</file>
+
+<file path=ppt/notesSlides/notesSlide12.xml><?xml version="1.0" encoding="utf-8"?>
+<p:notes xmlns:a="http://schemas.openxmlformats.org/drawingml/2006/main" xmlns:r="http://schemas.openxmlformats.org/officeDocument/2006/relationships" xmlns:p="http://schemas.openxmlformats.org/presentationml/2006/main">
+  <p:cSld>
+    <p:spTree>
+      <p:nvGrpSpPr>
+        <p:cNvPr id="1" name=""/>
+        <p:cNvGrpSpPr/>
+        <p:nvPr/>
+      </p:nvGrpSpPr>
+      <p:grpSpPr>
+        <a:xfrm>
+          <a:off x="0" y="0"/>
+          <a:ext cx="0" cy="0"/>
+          <a:chOff x="0" y="0"/>
+          <a:chExt cx="0" cy="0"/>
+        </a:xfrm>
+      </p:grpSpPr>
+      <p:sp>
+        <p:nvSpPr>
+          <p:cNvPr id="2" name="Slide Image Placeholder 1"/>
+          <p:cNvSpPr>
+            <a:spLocks noGrp="1" noRot="1" noChangeAspect="1"/>
+          </p:cNvSpPr>
+          <p:nvPr>
+            <p:ph type="sldImg"/>
+          </p:nvPr>
+        </p:nvSpPr>
+        <p:spPr/>
+      </p:sp>
+      <p:sp>
+        <p:nvSpPr>
+          <p:cNvPr id="3" name="Notes Placeholder 2"/>
+          <p:cNvSpPr>
+            <a:spLocks noGrp="1"/>
+          </p:cNvSpPr>
+          <p:nvPr>
+            <p:ph type="body" idx="1"/>
+          </p:nvPr>
+        </p:nvSpPr>
+        <p:spPr/>
+        <p:txBody>
+          <a:bodyPr/>
+          <a:lstStyle/>
+          <a:p>
+            <a:r>
+              <a:rPr lang="en-US" dirty="0"/>
+              <a:t/>
+            </a:r>
+            <a:endParaRPr lang="en-US" dirty="0"/>
+          </a:p>
+        </p:txBody>
+      </p:sp>
+      <p:sp>
+        <p:nvSpPr>
+          <p:cNvPr id="4" name="Slide Number Placeholder 3"/>
+          <p:cNvSpPr>
+            <a:spLocks noGrp="1"/>
+          </p:cNvSpPr>
+          <p:nvPr>
+            <p:ph type="sldNum" sz="quarter" idx="10"/>
+          </p:nvPr>
+        </p:nvSpPr>
+        <p:spPr/>
+        <p:txBody>
+          <a:bodyPr/>
+          <a:lstStyle/>
+          <a:p>
+            <a:fld id="{F7021451-1387-4CA6-816F-3879F97B5CBC}" type="slidenum">
+              <a:rPr lang="en-US"/>
+              <a:t>12</a:t>
+            </a:fld>
+            <a:endParaRPr lang="en-US"/>
+          </a:p>
+        </p:txBody>
+      </p:sp>
+    </p:spTree>
+    <p:extLst>
+      <p:ext uri="{BB962C8B-B14F-4D97-AF65-F5344CB8AC3E}">
+        <p14:creationId xmlns:p14="http://schemas.microsoft.com/office/powerpoint/2010/main" val="1024086991"/>
+      </p:ext>
+    </p:extLst>
+  </p:cSld>
+  <p:clrMapOvr>
+    <a:masterClrMapping/>
+  </p:clrMapOvr>
+</p:notes>
+</file>
+
+<file path=ppt/notesSlides/notesSlide13.xml><?xml version="1.0" encoding="utf-8"?>
+<p:notes xmlns:a="http://schemas.openxmlformats.org/drawingml/2006/main" xmlns:r="http://schemas.openxmlformats.org/officeDocument/2006/relationships" xmlns:p="http://schemas.openxmlformats.org/presentationml/2006/main">
+  <p:cSld>
+    <p:spTree>
+      <p:nvGrpSpPr>
+        <p:cNvPr id="1" name=""/>
+        <p:cNvGrpSpPr/>
+        <p:nvPr/>
+      </p:nvGrpSpPr>
+      <p:grpSpPr>
+        <a:xfrm>
+          <a:off x="0" y="0"/>
+          <a:ext cx="0" cy="0"/>
+          <a:chOff x="0" y="0"/>
+          <a:chExt cx="0" cy="0"/>
+        </a:xfrm>
+      </p:grpSpPr>
+      <p:sp>
+        <p:nvSpPr>
+          <p:cNvPr id="2" name="Slide Image Placeholder 1"/>
+          <p:cNvSpPr>
+            <a:spLocks noGrp="1" noRot="1" noChangeAspect="1"/>
+          </p:cNvSpPr>
+          <p:nvPr>
+            <p:ph type="sldImg"/>
+          </p:nvPr>
+        </p:nvSpPr>
+        <p:spPr/>
+      </p:sp>
+      <p:sp>
+        <p:nvSpPr>
+          <p:cNvPr id="3" name="Notes Placeholder 2"/>
+          <p:cNvSpPr>
+            <a:spLocks noGrp="1"/>
+          </p:cNvSpPr>
+          <p:nvPr>
+            <p:ph type="body" idx="1"/>
+          </p:nvPr>
+        </p:nvSpPr>
+        <p:spPr/>
+        <p:txBody>
+          <a:bodyPr/>
+          <a:lstStyle/>
+          <a:p>
+            <a:r>
+              <a:rPr lang="en-US" dirty="0"/>
+              <a:t/>
+            </a:r>
+            <a:endParaRPr lang="en-US" dirty="0"/>
+          </a:p>
+        </p:txBody>
+      </p:sp>
+      <p:sp>
+        <p:nvSpPr>
+          <p:cNvPr id="4" name="Slide Number Placeholder 3"/>
+          <p:cNvSpPr>
+            <a:spLocks noGrp="1"/>
+          </p:cNvSpPr>
+          <p:nvPr>
+            <p:ph type="sldNum" sz="quarter" idx="10"/>
+          </p:nvPr>
+        </p:nvSpPr>
+        <p:spPr/>
+        <p:txBody>
+          <a:bodyPr/>
+          <a:lstStyle/>
+          <a:p>
+            <a:fld id="{F7021451-1387-4CA6-816F-3879F97B5CBC}" type="slidenum">
+              <a:rPr lang="en-US"/>
+              <a:t>13</a:t>
             </a:fld>
             <a:endParaRPr lang="en-US"/>
           </a:p>
@@ -1876,102 +2143,6 @@
         </p:nvSpPr>
         <p:spPr>
           <a:xfrm>
-            <a:off x="406301" y="1223963"/>
-            <a:ext cx="8498026" cy="274290"/>
-          </a:xfrm>
-          <a:prstGeom prst="rect">
-            <a:avLst/>
-          </a:prstGeom>
-          <a:noFill/>
-          <a:ln/>
-        </p:spPr>
-        <p:txBody>
-          <a:bodyPr wrap="square" lIns="0" tIns="0" rIns="0" bIns="0" rtlCol="0" anchor="t"/>
-          <a:lstStyle/>
-          <a:p>
-            <a:pPr algn="l" indent="0" marL="0">
-              <a:lnSpc>
-                <a:spcPts val="2160"/>
-              </a:lnSpc>
-              <a:spcBef>
-                <a:spcPts val="600"/>
-              </a:spcBef>
-              <a:spcAft>
-                <a:spcPts val="800"/>
-              </a:spcAft>
-              <a:buNone/>
-            </a:pPr>
-            <a:r>
-              <a:rPr lang="en-US" sz="1800" b="1" dirty="0">
-                <a:solidFill>
-                  <a:srgbClr val="997929"/>
-                </a:solidFill>
-                <a:latin typeface="Times New Roman" pitchFamily="34" charset="0"/>
-                <a:ea typeface="Times New Roman" pitchFamily="34" charset="-122"/>
-                <a:cs typeface="Times New Roman" pitchFamily="34" charset="-120"/>
-              </a:rPr>
-              <a:t>Learning objective</a:t>
-            </a:r>
-            <a:endParaRPr lang="en-US" sz="1800" dirty="0"/>
-          </a:p>
-        </p:txBody>
-      </p:sp>
-      <p:sp>
-        <p:nvSpPr>
-          <p:cNvPr id="6" name="Text 4"/>
-          <p:cNvSpPr/>
-          <p:nvPr/>
-        </p:nvSpPr>
-        <p:spPr>
-          <a:xfrm>
-            <a:off x="406301" y="1637854"/>
-            <a:ext cx="8498026" cy="426541"/>
-          </a:xfrm>
-          <a:prstGeom prst="rect">
-            <a:avLst/>
-          </a:prstGeom>
-          <a:noFill/>
-          <a:ln/>
-        </p:spPr>
-        <p:txBody>
-          <a:bodyPr wrap="square" lIns="0" tIns="0" rIns="0" bIns="0" rtlCol="0" anchor="t"/>
-          <a:lstStyle/>
-          <a:p>
-            <a:pPr algn="l" indent="0" marL="0">
-              <a:lnSpc>
-                <a:spcPts val="1680"/>
-              </a:lnSpc>
-              <a:spcBef>
-                <a:spcPts val="300"/>
-              </a:spcBef>
-              <a:spcAft>
-                <a:spcPts val="300"/>
-              </a:spcAft>
-              <a:buNone/>
-            </a:pPr>
-            <a:r>
-              <a:rPr lang="en-US" sz="1200" dirty="0">
-                <a:solidFill>
-                  <a:srgbClr val="1A1A1A"/>
-                </a:solidFill>
-                <a:latin typeface="Georgia" pitchFamily="34" charset="0"/>
-                <a:ea typeface="Georgia" pitchFamily="34" charset="-122"/>
-                <a:cs typeface="Georgia" pitchFamily="34" charset="-120"/>
-              </a:rPr>
-              <a:t>Students engage three specific Indian mathematical works at primary-source level, articulating what each established and what limits each had.</a:t>
-            </a:r>
-            <a:endParaRPr lang="en-US" sz="1200" dirty="0"/>
-          </a:p>
-        </p:txBody>
-      </p:sp>
-      <p:sp>
-        <p:nvSpPr>
-          <p:cNvPr id="7" name="Text 5"/>
-          <p:cNvSpPr/>
-          <p:nvPr/>
-        </p:nvSpPr>
-        <p:spPr>
-          <a:xfrm>
             <a:off x="406301" y="4434929"/>
             <a:ext cx="8498026" cy="213271"/>
           </a:xfrm>
@@ -2116,7 +2287,7 @@
                 <a:ea typeface="Times New Roman" pitchFamily="34" charset="-122"/>
                 <a:cs typeface="Times New Roman" pitchFamily="34" charset="-120"/>
               </a:rPr>
-              <a:t>Citation(s) used</a:t>
+              <a:t>Wrap-up (5 min)</a:t>
             </a:r>
             <a:endParaRPr lang="en-US" sz="1800" dirty="0"/>
           </a:p>
@@ -2130,8 +2301,8 @@
         </p:nvSpPr>
         <p:spPr>
           <a:xfrm>
-            <a:off x="406301" y="870942"/>
-            <a:ext cx="8498026" cy="426541"/>
+            <a:off x="634901" y="883593"/>
+            <a:ext cx="8102798" cy="281880"/>
           </a:xfrm>
           <a:prstGeom prst="rect">
             <a:avLst/>
@@ -2143,8 +2314,74 @@
           <a:bodyPr wrap="square" lIns="0" tIns="0" rIns="0" bIns="0" rtlCol="0" anchor="t"/>
           <a:lstStyle/>
           <a:p>
+            <a:pPr algn="l" marL="342900" indent="-342900">
+              <a:lnSpc>
+                <a:spcPts val="1620"/>
+              </a:lnSpc>
+              <a:spcAft>
+                <a:spcPts val="300"/>
+              </a:spcAft>
+              <a:buSzPct val="100000"/>
+              <a:buChar char="•"/>
+            </a:pPr>
+            <a:r>
+              <a:rPr lang="en-US" sz="1200" dirty="0">
+                <a:solidFill>
+                  <a:srgbClr val="1A1A1A"/>
+                </a:solidFill>
+                <a:latin typeface="Georgia" pitchFamily="34" charset="0"/>
+                <a:ea typeface="Georgia" pitchFamily="34" charset="-122"/>
+                <a:cs typeface="Georgia" pitchFamily="34" charset="-120"/>
+              </a:rPr>
+              <a:t>Preview Day 5: </a:t>
+            </a:r>
             <a:pPr algn="l" indent="0" marL="0">
               <a:lnSpc>
+                <a:spcPts val="1620"/>
+              </a:lnSpc>
+              <a:spcAft>
+                <a:spcPts val="300"/>
+              </a:spcAft>
+              <a:buNone/>
+            </a:pPr>
+            <a:r>
+              <a:rPr lang="en-US" sz="1200" i="1" dirty="0">
+                <a:solidFill>
+                  <a:srgbClr val="1A1A1A"/>
+                </a:solidFill>
+                <a:latin typeface="Georgia" pitchFamily="34" charset="0"/>
+                <a:ea typeface="Georgia" pitchFamily="34" charset="-122"/>
+                <a:cs typeface="Georgia" pitchFamily="34" charset="-120"/>
+              </a:rPr>
+              <a:t>"Tomorrow — mid-module + paper topic commitment."</a:t>
+            </a:r>
+            <a:endParaRPr lang="en-US" sz="1200" dirty="0"/>
+          </a:p>
+        </p:txBody>
+      </p:sp>
+      <p:sp>
+        <p:nvSpPr>
+          <p:cNvPr id="5" name="Text 3"/>
+          <p:cNvSpPr/>
+          <p:nvPr/>
+        </p:nvSpPr>
+        <p:spPr>
+          <a:xfrm>
+            <a:off x="406301" y="4434929"/>
+            <a:ext cx="8498026" cy="213271"/>
+          </a:xfrm>
+          <a:prstGeom prst="rect">
+            <a:avLst/>
+          </a:prstGeom>
+          <a:noFill/>
+          <a:ln/>
+        </p:spPr>
+        <p:txBody>
+          <a:bodyPr wrap="square" lIns="0" tIns="0" rIns="0" bIns="0" rtlCol="0" anchor="t"/>
+          <a:lstStyle/>
+          <a:p>
+            <a:pPr algn="l" indent="0" marL="0">
+              <a:lnSpc>
                 <a:spcPts val="1680"/>
               </a:lnSpc>
               <a:spcBef>
@@ -2164,10 +2401,255 @@
                 <a:ea typeface="Georgia" pitchFamily="34" charset="-122"/>
                 <a:cs typeface="Georgia" pitchFamily="34" charset="-120"/>
               </a:rPr>
-              <a:t>– Plofker (2009), Chapters 4–7. – Hayashi (1995) on Bakhshali. – George Joseph (2011). </a:t>
-            </a:r>
+              <a:t>Senior ·  · IKS Curriculum</a:t>
+            </a:r>
+            <a:endParaRPr lang="en-US" sz="1200" dirty="0"/>
+          </a:p>
+        </p:txBody>
+      </p:sp>
+    </p:spTree>
+  </p:cSld>
+  <p:clrMapOvr>
+    <a:masterClrMapping/>
+  </p:clrMapOvr>
+</p:sld>
+</file>
+
+<file path=ppt/slides/slide11.xml><?xml version="1.0" encoding="utf-8"?>
+<p:sld xmlns:a="http://schemas.openxmlformats.org/drawingml/2006/main" xmlns:r="http://schemas.openxmlformats.org/officeDocument/2006/relationships" xmlns:p="http://schemas.openxmlformats.org/presentationml/2006/main">
+  <p:cSld name="Slide 11">
+    <p:bg>
+      <p:bgPr>
+        <a:solidFill>
+          <a:srgbClr val="FAF7F2"/>
+        </a:solidFill>
+      </p:bgPr>
+    </p:bg>
+    <p:spTree>
+      <p:nvGrpSpPr>
+        <p:cNvPr id="1" name=""/>
+        <p:cNvGrpSpPr/>
+        <p:nvPr/>
+      </p:nvGrpSpPr>
+      <p:grpSpPr>
+        <a:xfrm>
+          <a:off x="0" y="0"/>
+          <a:ext cx="0" cy="0"/>
+          <a:chOff x="0" y="0"/>
+          <a:chExt cx="0" cy="0"/>
+        </a:xfrm>
+      </p:grpSpPr>
+      <p:sp>
+        <p:nvSpPr>
+          <p:cNvPr id="2" name="Text 0"/>
+          <p:cNvSpPr/>
+          <p:nvPr/>
+        </p:nvSpPr>
+        <p:spPr>
+          <a:xfrm>
+            <a:off x="0" y="0"/>
+            <a:ext cx="9144000" cy="101501"/>
+          </a:xfrm>
+          <a:prstGeom prst="rect">
+            <a:avLst/>
+          </a:prstGeom>
+          <a:solidFill>
+            <a:srgbClr val="5D1D2E"/>
+          </a:solidFill>
+          <a:ln/>
+        </p:spPr>
+        <p:txBody>
+          <a:bodyPr wrap="square" rtlCol="0" anchor="ctr"/>
+          <a:lstStyle/>
+          <a:p>
+            <a:pPr indent="0" marL="0">
+              <a:buNone/>
+            </a:pPr>
+            <a:endParaRPr lang="en-US" dirty="0"/>
+          </a:p>
+        </p:txBody>
+      </p:sp>
+      <p:sp>
+        <p:nvSpPr>
+          <p:cNvPr id="3" name="Text 1"/>
+          <p:cNvSpPr/>
+          <p:nvPr/>
+        </p:nvSpPr>
+        <p:spPr>
+          <a:xfrm>
+            <a:off x="406301" y="457051"/>
+            <a:ext cx="8498026" cy="274290"/>
+          </a:xfrm>
+          <a:prstGeom prst="rect">
+            <a:avLst/>
+          </a:prstGeom>
+          <a:noFill/>
+          <a:ln/>
+        </p:spPr>
+        <p:txBody>
+          <a:bodyPr wrap="square" lIns="0" tIns="0" rIns="0" bIns="0" rtlCol="0" anchor="t"/>
+          <a:lstStyle/>
+          <a:p>
             <a:pPr algn="l" indent="0" marL="0">
               <a:lnSpc>
+                <a:spcPts val="2160"/>
+              </a:lnSpc>
+              <a:spcBef>
+                <a:spcPts val="600"/>
+              </a:spcBef>
+              <a:spcAft>
+                <a:spcPts val="800"/>
+              </a:spcAft>
+              <a:buNone/>
+            </a:pPr>
+            <a:r>
+              <a:rPr lang="en-US" sz="1800" b="1" dirty="0">
+                <a:solidFill>
+                  <a:srgbClr val="997929"/>
+                </a:solidFill>
+                <a:latin typeface="Times New Roman" pitchFamily="34" charset="0"/>
+                <a:ea typeface="Times New Roman" pitchFamily="34" charset="-122"/>
+                <a:cs typeface="Times New Roman" pitchFamily="34" charset="-120"/>
+              </a:rPr>
+              <a:t>Differentiation</a:t>
+            </a:r>
+            <a:endParaRPr lang="en-US" sz="1800" dirty="0"/>
+          </a:p>
+        </p:txBody>
+      </p:sp>
+      <p:sp>
+        <p:nvSpPr>
+          <p:cNvPr id="4" name="Text 2"/>
+          <p:cNvSpPr/>
+          <p:nvPr/>
+        </p:nvSpPr>
+        <p:spPr>
+          <a:xfrm>
+            <a:off x="634901" y="883593"/>
+            <a:ext cx="8102798" cy="525661"/>
+          </a:xfrm>
+          <a:prstGeom prst="rect">
+            <a:avLst/>
+          </a:prstGeom>
+          <a:noFill/>
+          <a:ln/>
+        </p:spPr>
+        <p:txBody>
+          <a:bodyPr wrap="square" lIns="0" tIns="0" rIns="0" bIns="0" rtlCol="0" anchor="t"/>
+          <a:lstStyle/>
+          <a:p>
+            <a:pPr algn="l" marL="342900" indent="-342900">
+              <a:lnSpc>
+                <a:spcPts val="1620"/>
+              </a:lnSpc>
+              <a:spcAft>
+                <a:spcPts val="300"/>
+              </a:spcAft>
+              <a:buSzPct val="100000"/>
+              <a:buChar char="•"/>
+            </a:pPr>
+            <a:r>
+              <a:rPr lang="en-US" sz="1200" b="1" dirty="0">
+                <a:solidFill>
+                  <a:srgbClr val="1A1A1A"/>
+                </a:solidFill>
+                <a:latin typeface="Georgia" pitchFamily="34" charset="0"/>
+                <a:ea typeface="Georgia" pitchFamily="34" charset="-122"/>
+                <a:cs typeface="Georgia" pitchFamily="34" charset="-120"/>
+              </a:rPr>
+              <a:t>Tier up:</a:t>
+            </a:r>
+            <a:pPr algn="l" indent="0" marL="0">
+              <a:lnSpc>
+                <a:spcPts val="1620"/>
+              </a:lnSpc>
+              <a:spcAft>
+                <a:spcPts val="300"/>
+              </a:spcAft>
+              <a:buNone/>
+            </a:pPr>
+            <a:r>
+              <a:rPr lang="en-US" sz="1200" dirty="0">
+                <a:solidFill>
+                  <a:srgbClr val="1A1A1A"/>
+                </a:solidFill>
+                <a:latin typeface="Georgia" pitchFamily="34" charset="0"/>
+                <a:ea typeface="Georgia" pitchFamily="34" charset="-122"/>
+                <a:cs typeface="Georgia" pitchFamily="34" charset="-120"/>
+              </a:rPr>
+              <a:t> Compute Mādhava's series numerically for 100 terms. How close to π?</a:t>
+            </a:r>
+            <a:endParaRPr lang="en-US" sz="1200" dirty="0"/>
+          </a:p>
+          <a:p>
+            <a:pPr algn="l" marL="342900" indent="-342900">
+              <a:lnSpc>
+                <a:spcPts val="1620"/>
+              </a:lnSpc>
+              <a:spcAft>
+                <a:spcPts val="300"/>
+              </a:spcAft>
+              <a:buSzPct val="100000"/>
+              <a:buChar char="•"/>
+            </a:pPr>
+            <a:r>
+              <a:rPr lang="en-US" sz="1200" b="1" dirty="0">
+                <a:solidFill>
+                  <a:srgbClr val="1A1A1A"/>
+                </a:solidFill>
+                <a:latin typeface="Georgia" pitchFamily="34" charset="0"/>
+                <a:ea typeface="Georgia" pitchFamily="34" charset="-122"/>
+                <a:cs typeface="Georgia" pitchFamily="34" charset="-120"/>
+              </a:rPr>
+              <a:t>Tier down:</a:t>
+            </a:r>
+            <a:pPr algn="l" indent="0" marL="0">
+              <a:lnSpc>
+                <a:spcPts val="1620"/>
+              </a:lnSpc>
+              <a:spcAft>
+                <a:spcPts val="300"/>
+              </a:spcAft>
+              <a:buNone/>
+            </a:pPr>
+            <a:r>
+              <a:rPr lang="en-US" sz="1200" dirty="0">
+                <a:solidFill>
+                  <a:srgbClr val="1A1A1A"/>
+                </a:solidFill>
+                <a:latin typeface="Georgia" pitchFamily="34" charset="0"/>
+                <a:ea typeface="Georgia" pitchFamily="34" charset="-122"/>
+                <a:cs typeface="Georgia" pitchFamily="34" charset="-120"/>
+              </a:rPr>
+              <a:t> Focus on Bakhshali + Bhāskara names with dates.</a:t>
+            </a:r>
+            <a:endParaRPr lang="en-US" sz="1200" dirty="0"/>
+          </a:p>
+        </p:txBody>
+      </p:sp>
+      <p:sp>
+        <p:nvSpPr>
+          <p:cNvPr id="5" name="Text 3"/>
+          <p:cNvSpPr/>
+          <p:nvPr/>
+        </p:nvSpPr>
+        <p:spPr>
+          <a:xfrm>
+            <a:off x="406301" y="4434929"/>
+            <a:ext cx="8498026" cy="213271"/>
+          </a:xfrm>
+          <a:prstGeom prst="rect">
+            <a:avLst/>
+          </a:prstGeom>
+          <a:noFill/>
+          <a:ln/>
+        </p:spPr>
+        <p:txBody>
+          <a:bodyPr wrap="square" lIns="0" tIns="0" rIns="0" bIns="0" rtlCol="0" anchor="t"/>
+          <a:lstStyle/>
+          <a:p>
+            <a:pPr algn="l" indent="0" marL="0">
+              <a:lnSpc>
                 <a:spcPts val="1680"/>
               </a:lnSpc>
               <a:spcBef>
@@ -2179,6 +2661,458 @@
               <a:buNone/>
             </a:pPr>
             <a:r>
+              <a:rPr lang="en-US" sz="1200" dirty="0">
+                <a:solidFill>
+                  <a:srgbClr val="1A1A1A"/>
+                </a:solidFill>
+                <a:latin typeface="Georgia" pitchFamily="34" charset="0"/>
+                <a:ea typeface="Georgia" pitchFamily="34" charset="-122"/>
+                <a:cs typeface="Georgia" pitchFamily="34" charset="-120"/>
+              </a:rPr>
+              <a:t>Senior ·  · IKS Curriculum</a:t>
+            </a:r>
+            <a:endParaRPr lang="en-US" sz="1200" dirty="0"/>
+          </a:p>
+        </p:txBody>
+      </p:sp>
+    </p:spTree>
+  </p:cSld>
+  <p:clrMapOvr>
+    <a:masterClrMapping/>
+  </p:clrMapOvr>
+</p:sld>
+</file>
+
+<file path=ppt/slides/slide12.xml><?xml version="1.0" encoding="utf-8"?>
+<p:sld xmlns:a="http://schemas.openxmlformats.org/drawingml/2006/main" xmlns:r="http://schemas.openxmlformats.org/officeDocument/2006/relationships" xmlns:p="http://schemas.openxmlformats.org/presentationml/2006/main">
+  <p:cSld name="Slide 12">
+    <p:bg>
+      <p:bgPr>
+        <a:solidFill>
+          <a:srgbClr val="FAF7F2"/>
+        </a:solidFill>
+      </p:bgPr>
+    </p:bg>
+    <p:spTree>
+      <p:nvGrpSpPr>
+        <p:cNvPr id="1" name=""/>
+        <p:cNvGrpSpPr/>
+        <p:nvPr/>
+      </p:nvGrpSpPr>
+      <p:grpSpPr>
+        <a:xfrm>
+          <a:off x="0" y="0"/>
+          <a:ext cx="0" cy="0"/>
+          <a:chOff x="0" y="0"/>
+          <a:chExt cx="0" cy="0"/>
+        </a:xfrm>
+      </p:grpSpPr>
+      <p:sp>
+        <p:nvSpPr>
+          <p:cNvPr id="2" name="Text 0"/>
+          <p:cNvSpPr/>
+          <p:nvPr/>
+        </p:nvSpPr>
+        <p:spPr>
+          <a:xfrm>
+            <a:off x="0" y="0"/>
+            <a:ext cx="9144000" cy="101501"/>
+          </a:xfrm>
+          <a:prstGeom prst="rect">
+            <a:avLst/>
+          </a:prstGeom>
+          <a:solidFill>
+            <a:srgbClr val="5D1D2E"/>
+          </a:solidFill>
+          <a:ln/>
+        </p:spPr>
+        <p:txBody>
+          <a:bodyPr wrap="square" rtlCol="0" anchor="ctr"/>
+          <a:lstStyle/>
+          <a:p>
+            <a:pPr indent="0" marL="0">
+              <a:buNone/>
+            </a:pPr>
+            <a:endParaRPr lang="en-US" dirty="0"/>
+          </a:p>
+        </p:txBody>
+      </p:sp>
+      <p:sp>
+        <p:nvSpPr>
+          <p:cNvPr id="3" name="Text 1"/>
+          <p:cNvSpPr/>
+          <p:nvPr/>
+        </p:nvSpPr>
+        <p:spPr>
+          <a:xfrm>
+            <a:off x="406301" y="457051"/>
+            <a:ext cx="8498026" cy="274290"/>
+          </a:xfrm>
+          <a:prstGeom prst="rect">
+            <a:avLst/>
+          </a:prstGeom>
+          <a:noFill/>
+          <a:ln/>
+        </p:spPr>
+        <p:txBody>
+          <a:bodyPr wrap="square" lIns="0" tIns="0" rIns="0" bIns="0" rtlCol="0" anchor="t"/>
+          <a:lstStyle/>
+          <a:p>
+            <a:pPr algn="l" indent="0" marL="0">
+              <a:lnSpc>
+                <a:spcPts val="2160"/>
+              </a:lnSpc>
+              <a:spcBef>
+                <a:spcPts val="600"/>
+              </a:spcBef>
+              <a:spcAft>
+                <a:spcPts val="800"/>
+              </a:spcAft>
+              <a:buNone/>
+            </a:pPr>
+            <a:r>
+              <a:rPr lang="en-US" sz="1800" b="1" dirty="0">
+                <a:solidFill>
+                  <a:srgbClr val="997929"/>
+                </a:solidFill>
+                <a:latin typeface="Times New Roman" pitchFamily="34" charset="0"/>
+                <a:ea typeface="Times New Roman" pitchFamily="34" charset="-122"/>
+                <a:cs typeface="Times New Roman" pitchFamily="34" charset="-120"/>
+              </a:rPr>
+              <a:t>Teacher notes</a:t>
+            </a:r>
+            <a:endParaRPr lang="en-US" sz="1800" dirty="0"/>
+          </a:p>
+        </p:txBody>
+      </p:sp>
+      <p:sp>
+        <p:nvSpPr>
+          <p:cNvPr id="4" name="Text 2"/>
+          <p:cNvSpPr/>
+          <p:nvPr/>
+        </p:nvSpPr>
+        <p:spPr>
+          <a:xfrm>
+            <a:off x="634901" y="883593"/>
+            <a:ext cx="8102798" cy="731341"/>
+          </a:xfrm>
+          <a:prstGeom prst="rect">
+            <a:avLst/>
+          </a:prstGeom>
+          <a:noFill/>
+          <a:ln/>
+        </p:spPr>
+        <p:txBody>
+          <a:bodyPr wrap="square" lIns="0" tIns="0" rIns="0" bIns="0" rtlCol="0" anchor="t"/>
+          <a:lstStyle/>
+          <a:p>
+            <a:pPr algn="l" marL="342900" indent="-342900">
+              <a:lnSpc>
+                <a:spcPts val="1620"/>
+              </a:lnSpc>
+              <a:spcAft>
+                <a:spcPts val="300"/>
+              </a:spcAft>
+              <a:buSzPct val="100000"/>
+              <a:buChar char="•"/>
+            </a:pPr>
+            <a:r>
+              <a:rPr lang="en-US" sz="1200" dirty="0">
+                <a:solidFill>
+                  <a:srgbClr val="1A1A1A"/>
+                </a:solidFill>
+                <a:latin typeface="Georgia" pitchFamily="34" charset="0"/>
+                <a:ea typeface="Georgia" pitchFamily="34" charset="-122"/>
+                <a:cs typeface="Georgia" pitchFamily="34" charset="-120"/>
+              </a:rPr>
+              <a:t>The Madhava-Leibniz attribution is one of the most pedagogically useful examples of "real Indian contribution, slow Western recognition."</a:t>
+            </a:r>
+            <a:endParaRPr lang="en-US" sz="1200" dirty="0"/>
+          </a:p>
+          <a:p>
+            <a:pPr algn="l" marL="342900" indent="-342900">
+              <a:lnSpc>
+                <a:spcPts val="1620"/>
+              </a:lnSpc>
+              <a:spcAft>
+                <a:spcPts val="300"/>
+              </a:spcAft>
+              <a:buSzPct val="100000"/>
+              <a:buChar char="•"/>
+            </a:pPr>
+            <a:r>
+              <a:rPr lang="en-US" sz="1200" dirty="0">
+                <a:solidFill>
+                  <a:srgbClr val="1A1A1A"/>
+                </a:solidFill>
+                <a:latin typeface="Georgia" pitchFamily="34" charset="0"/>
+                <a:ea typeface="Georgia" pitchFamily="34" charset="-122"/>
+                <a:cs typeface="Georgia" pitchFamily="34" charset="-120"/>
+              </a:rPr>
+              <a:t>Don't oversell: Mādhava's work was discovered/recognised in the West via George Joseph and others in the late 20th c.</a:t>
+            </a:r>
+            <a:endParaRPr lang="en-US" sz="1200" dirty="0"/>
+          </a:p>
+        </p:txBody>
+      </p:sp>
+      <p:sp>
+        <p:nvSpPr>
+          <p:cNvPr id="5" name="Text 3"/>
+          <p:cNvSpPr/>
+          <p:nvPr/>
+        </p:nvSpPr>
+        <p:spPr>
+          <a:xfrm>
+            <a:off x="406301" y="4434929"/>
+            <a:ext cx="8498026" cy="213271"/>
+          </a:xfrm>
+          <a:prstGeom prst="rect">
+            <a:avLst/>
+          </a:prstGeom>
+          <a:noFill/>
+          <a:ln/>
+        </p:spPr>
+        <p:txBody>
+          <a:bodyPr wrap="square" lIns="0" tIns="0" rIns="0" bIns="0" rtlCol="0" anchor="t"/>
+          <a:lstStyle/>
+          <a:p>
+            <a:pPr algn="l" indent="0" marL="0">
+              <a:lnSpc>
+                <a:spcPts val="1680"/>
+              </a:lnSpc>
+              <a:spcBef>
+                <a:spcPts val="300"/>
+              </a:spcBef>
+              <a:spcAft>
+                <a:spcPts val="300"/>
+              </a:spcAft>
+              <a:buNone/>
+            </a:pPr>
+            <a:r>
+              <a:rPr lang="en-US" sz="1200" dirty="0">
+                <a:solidFill>
+                  <a:srgbClr val="1A1A1A"/>
+                </a:solidFill>
+                <a:latin typeface="Georgia" pitchFamily="34" charset="0"/>
+                <a:ea typeface="Georgia" pitchFamily="34" charset="-122"/>
+                <a:cs typeface="Georgia" pitchFamily="34" charset="-120"/>
+              </a:rPr>
+              <a:t>Senior ·  · IKS Curriculum</a:t>
+            </a:r>
+            <a:endParaRPr lang="en-US" sz="1200" dirty="0"/>
+          </a:p>
+        </p:txBody>
+      </p:sp>
+    </p:spTree>
+  </p:cSld>
+  <p:clrMapOvr>
+    <a:masterClrMapping/>
+  </p:clrMapOvr>
+</p:sld>
+</file>
+
+<file path=ppt/slides/slide13.xml><?xml version="1.0" encoding="utf-8"?>
+<p:sld xmlns:a="http://schemas.openxmlformats.org/drawingml/2006/main" xmlns:r="http://schemas.openxmlformats.org/officeDocument/2006/relationships" xmlns:p="http://schemas.openxmlformats.org/presentationml/2006/main">
+  <p:cSld name="Slide 13">
+    <p:bg>
+      <p:bgPr>
+        <a:solidFill>
+          <a:srgbClr val="FAF7F2"/>
+        </a:solidFill>
+      </p:bgPr>
+    </p:bg>
+    <p:spTree>
+      <p:nvGrpSpPr>
+        <p:cNvPr id="1" name=""/>
+        <p:cNvGrpSpPr/>
+        <p:nvPr/>
+      </p:nvGrpSpPr>
+      <p:grpSpPr>
+        <a:xfrm>
+          <a:off x="0" y="0"/>
+          <a:ext cx="0" cy="0"/>
+          <a:chOff x="0" y="0"/>
+          <a:chExt cx="0" cy="0"/>
+        </a:xfrm>
+      </p:grpSpPr>
+      <p:sp>
+        <p:nvSpPr>
+          <p:cNvPr id="2" name="Text 0"/>
+          <p:cNvSpPr/>
+          <p:nvPr/>
+        </p:nvSpPr>
+        <p:spPr>
+          <a:xfrm>
+            <a:off x="0" y="0"/>
+            <a:ext cx="9144000" cy="101501"/>
+          </a:xfrm>
+          <a:prstGeom prst="rect">
+            <a:avLst/>
+          </a:prstGeom>
+          <a:solidFill>
+            <a:srgbClr val="5D1D2E"/>
+          </a:solidFill>
+          <a:ln/>
+        </p:spPr>
+        <p:txBody>
+          <a:bodyPr wrap="square" rtlCol="0" anchor="ctr"/>
+          <a:lstStyle/>
+          <a:p>
+            <a:pPr indent="0" marL="0">
+              <a:buNone/>
+            </a:pPr>
+            <a:endParaRPr lang="en-US" dirty="0"/>
+          </a:p>
+        </p:txBody>
+      </p:sp>
+      <p:sp>
+        <p:nvSpPr>
+          <p:cNvPr id="3" name="Text 1"/>
+          <p:cNvSpPr/>
+          <p:nvPr/>
+        </p:nvSpPr>
+        <p:spPr>
+          <a:xfrm>
+            <a:off x="406301" y="457051"/>
+            <a:ext cx="8498026" cy="274290"/>
+          </a:xfrm>
+          <a:prstGeom prst="rect">
+            <a:avLst/>
+          </a:prstGeom>
+          <a:noFill/>
+          <a:ln/>
+        </p:spPr>
+        <p:txBody>
+          <a:bodyPr wrap="square" lIns="0" tIns="0" rIns="0" bIns="0" rtlCol="0" anchor="t"/>
+          <a:lstStyle/>
+          <a:p>
+            <a:pPr algn="l" indent="0" marL="0">
+              <a:lnSpc>
+                <a:spcPts val="2160"/>
+              </a:lnSpc>
+              <a:spcBef>
+                <a:spcPts val="600"/>
+              </a:spcBef>
+              <a:spcAft>
+                <a:spcPts val="800"/>
+              </a:spcAft>
+              <a:buNone/>
+            </a:pPr>
+            <a:r>
+              <a:rPr lang="en-US" sz="1800" b="1" dirty="0">
+                <a:solidFill>
+                  <a:srgbClr val="997929"/>
+                </a:solidFill>
+                <a:latin typeface="Times New Roman" pitchFamily="34" charset="0"/>
+                <a:ea typeface="Times New Roman" pitchFamily="34" charset="-122"/>
+                <a:cs typeface="Times New Roman" pitchFamily="34" charset="-120"/>
+              </a:rPr>
+              <a:t>Citation(s) used</a:t>
+            </a:r>
+            <a:endParaRPr lang="en-US" sz="1800" dirty="0"/>
+          </a:p>
+        </p:txBody>
+      </p:sp>
+      <p:sp>
+        <p:nvSpPr>
+          <p:cNvPr id="4" name="Text 2"/>
+          <p:cNvSpPr/>
+          <p:nvPr/>
+        </p:nvSpPr>
+        <p:spPr>
+          <a:xfrm>
+            <a:off x="634901" y="883593"/>
+            <a:ext cx="8102798" cy="769441"/>
+          </a:xfrm>
+          <a:prstGeom prst="rect">
+            <a:avLst/>
+          </a:prstGeom>
+          <a:noFill/>
+          <a:ln/>
+        </p:spPr>
+        <p:txBody>
+          <a:bodyPr wrap="square" lIns="0" tIns="0" rIns="0" bIns="0" rtlCol="0" anchor="t"/>
+          <a:lstStyle/>
+          <a:p>
+            <a:pPr algn="l" marL="342900" indent="-342900">
+              <a:lnSpc>
+                <a:spcPts val="1620"/>
+              </a:lnSpc>
+              <a:spcAft>
+                <a:spcPts val="300"/>
+              </a:spcAft>
+              <a:buSzPct val="100000"/>
+              <a:buChar char="•"/>
+            </a:pPr>
+            <a:r>
+              <a:rPr lang="en-US" sz="1200" dirty="0">
+                <a:solidFill>
+                  <a:srgbClr val="1A1A1A"/>
+                </a:solidFill>
+                <a:latin typeface="Georgia" pitchFamily="34" charset="0"/>
+                <a:ea typeface="Georgia" pitchFamily="34" charset="-122"/>
+                <a:cs typeface="Georgia" pitchFamily="34" charset="-120"/>
+              </a:rPr>
+              <a:t>Plofker (2009), Chapters 4–7.</a:t>
+            </a:r>
+            <a:endParaRPr lang="en-US" sz="1200" dirty="0"/>
+          </a:p>
+          <a:p>
+            <a:pPr algn="l" marL="342900" indent="-342900">
+              <a:lnSpc>
+                <a:spcPts val="1620"/>
+              </a:lnSpc>
+              <a:spcAft>
+                <a:spcPts val="300"/>
+              </a:spcAft>
+              <a:buSzPct val="100000"/>
+              <a:buChar char="•"/>
+            </a:pPr>
+            <a:r>
+              <a:rPr lang="en-US" sz="1200" dirty="0">
+                <a:solidFill>
+                  <a:srgbClr val="1A1A1A"/>
+                </a:solidFill>
+                <a:latin typeface="Georgia" pitchFamily="34" charset="0"/>
+                <a:ea typeface="Georgia" pitchFamily="34" charset="-122"/>
+                <a:cs typeface="Georgia" pitchFamily="34" charset="-120"/>
+              </a:rPr>
+              <a:t>Hayashi (1995) on Bakhshali.</a:t>
+            </a:r>
+            <a:endParaRPr lang="en-US" sz="1200" dirty="0"/>
+          </a:p>
+          <a:p>
+            <a:pPr algn="l" marL="342900" indent="-342900">
+              <a:lnSpc>
+                <a:spcPts val="1620"/>
+              </a:lnSpc>
+              <a:spcAft>
+                <a:spcPts val="300"/>
+              </a:spcAft>
+              <a:buSzPct val="100000"/>
+              <a:buChar char="•"/>
+            </a:pPr>
+            <a:r>
+              <a:rPr lang="en-US" sz="1200" dirty="0">
+                <a:solidFill>
+                  <a:srgbClr val="1A1A1A"/>
+                </a:solidFill>
+                <a:latin typeface="Georgia" pitchFamily="34" charset="0"/>
+                <a:ea typeface="Georgia" pitchFamily="34" charset="-122"/>
+                <a:cs typeface="Georgia" pitchFamily="34" charset="-120"/>
+              </a:rPr>
+              <a:t>George Joseph (2011). </a:t>
+            </a:r>
+            <a:pPr algn="l" indent="0" marL="0">
+              <a:lnSpc>
+                <a:spcPts val="1620"/>
+              </a:lnSpc>
+              <a:spcAft>
+                <a:spcPts val="300"/>
+              </a:spcAft>
+              <a:buNone/>
+            </a:pPr>
+            <a:r>
               <a:rPr lang="en-US" sz="1200" i="1" dirty="0">
                 <a:solidFill>
                   <a:srgbClr val="1A1A1A"/>
@@ -2191,11 +3125,8 @@
             </a:r>
             <a:pPr algn="l" indent="0" marL="0">
               <a:lnSpc>
-                <a:spcPts val="1680"/>
-              </a:lnSpc>
-              <a:spcBef>
-                <a:spcPts val="300"/>
-              </a:spcBef>
+                <a:spcPts val="1620"/>
+              </a:lnSpc>
               <a:spcAft>
                 <a:spcPts val="300"/>
               </a:spcAft>
@@ -2368,7 +3299,7 @@
                 <a:ea typeface="Times New Roman" pitchFamily="34" charset="-122"/>
                 <a:cs typeface="Times New Roman" pitchFamily="34" charset="-120"/>
               </a:rPr>
-              <a:t>Materials</a:t>
+              <a:t>Learning objective</a:t>
             </a:r>
             <a:endParaRPr lang="en-US" sz="1800" dirty="0"/>
           </a:p>
@@ -2416,53 +3347,7 @@
                 <a:ea typeface="Georgia" pitchFamily="34" charset="-122"/>
                 <a:cs typeface="Georgia" pitchFamily="34" charset="-120"/>
               </a:rPr>
-              <a:t>– Printed handout: one problem from Bhāskara II's </a:t>
-            </a:r>
-            <a:pPr algn="l" indent="0" marL="0">
-              <a:lnSpc>
-                <a:spcPts val="1680"/>
-              </a:lnSpc>
-              <a:spcBef>
-                <a:spcPts val="300"/>
-              </a:spcBef>
-              <a:spcAft>
-                <a:spcPts val="300"/>
-              </a:spcAft>
-              <a:buNone/>
-            </a:pPr>
-            <a:r>
-              <a:rPr lang="en-US" sz="1200" i="1" dirty="0">
-                <a:solidFill>
-                  <a:srgbClr val="1A1A1A"/>
-                </a:solidFill>
-                <a:latin typeface="Georgia" pitchFamily="34" charset="0"/>
-                <a:ea typeface="Georgia" pitchFamily="34" charset="-122"/>
-                <a:cs typeface="Georgia" pitchFamily="34" charset="-120"/>
-              </a:rPr>
-              <a:t>Līlāvatī</a:t>
-            </a:r>
-            <a:pPr algn="l" indent="0" marL="0">
-              <a:lnSpc>
-                <a:spcPts val="1680"/>
-              </a:lnSpc>
-              <a:spcBef>
-                <a:spcPts val="300"/>
-              </a:spcBef>
-              <a:spcAft>
-                <a:spcPts val="300"/>
-              </a:spcAft>
-              <a:buNone/>
-            </a:pPr>
-            <a:r>
-              <a:rPr lang="en-US" sz="1200" dirty="0">
-                <a:solidFill>
-                  <a:srgbClr val="1A1A1A"/>
-                </a:solidFill>
-                <a:latin typeface="Georgia" pitchFamily="34" charset="0"/>
-                <a:ea typeface="Georgia" pitchFamily="34" charset="-122"/>
-                <a:cs typeface="Georgia" pitchFamily="34" charset="-120"/>
-              </a:rPr>
-              <a:t> in English translation – Printed handout: statement of Mādhava's series for π</a:t>
+              <a:t>Students engage three specific Indian mathematical works at primary-source level, articulating what each established and what limits each had.</a:t>
             </a:r>
             <a:endParaRPr lang="en-US" sz="1200" dirty="0"/>
           </a:p>
@@ -2620,7 +3505,7 @@
                 <a:ea typeface="Times New Roman" pitchFamily="34" charset="-122"/>
                 <a:cs typeface="Times New Roman" pitchFamily="34" charset="-120"/>
               </a:rPr>
-              <a:t>Flow</a:t>
+              <a:t>Materials</a:t>
             </a:r>
             <a:endParaRPr lang="en-US" sz="1800" dirty="0"/>
           </a:p>
@@ -2629,6 +3514,116 @@
       <p:sp>
         <p:nvSpPr>
           <p:cNvPr id="4" name="Text 2"/>
+          <p:cNvSpPr/>
+          <p:nvPr/>
+        </p:nvSpPr>
+        <p:spPr>
+          <a:xfrm>
+            <a:off x="634901" y="883593"/>
+            <a:ext cx="8102798" cy="525661"/>
+          </a:xfrm>
+          <a:prstGeom prst="rect">
+            <a:avLst/>
+          </a:prstGeom>
+          <a:noFill/>
+          <a:ln/>
+        </p:spPr>
+        <p:txBody>
+          <a:bodyPr wrap="square" lIns="0" tIns="0" rIns="0" bIns="0" rtlCol="0" anchor="t"/>
+          <a:lstStyle/>
+          <a:p>
+            <a:pPr algn="l" marL="342900" indent="-342900">
+              <a:lnSpc>
+                <a:spcPts val="1620"/>
+              </a:lnSpc>
+              <a:spcAft>
+                <a:spcPts val="300"/>
+              </a:spcAft>
+              <a:buSzPct val="100000"/>
+              <a:buChar char="•"/>
+            </a:pPr>
+            <a:r>
+              <a:rPr lang="en-US" sz="1200" dirty="0">
+                <a:solidFill>
+                  <a:srgbClr val="1A1A1A"/>
+                </a:solidFill>
+                <a:latin typeface="Georgia" pitchFamily="34" charset="0"/>
+                <a:ea typeface="Georgia" pitchFamily="34" charset="-122"/>
+                <a:cs typeface="Georgia" pitchFamily="34" charset="-120"/>
+              </a:rPr>
+              <a:t>Printed handout: one problem from Bhāskara II's </a:t>
+            </a:r>
+            <a:pPr algn="l" indent="0" marL="0">
+              <a:lnSpc>
+                <a:spcPts val="1620"/>
+              </a:lnSpc>
+              <a:spcAft>
+                <a:spcPts val="300"/>
+              </a:spcAft>
+              <a:buNone/>
+            </a:pPr>
+            <a:r>
+              <a:rPr lang="en-US" sz="1200" i="1" dirty="0">
+                <a:solidFill>
+                  <a:srgbClr val="1A1A1A"/>
+                </a:solidFill>
+                <a:latin typeface="Georgia" pitchFamily="34" charset="0"/>
+                <a:ea typeface="Georgia" pitchFamily="34" charset="-122"/>
+                <a:cs typeface="Georgia" pitchFamily="34" charset="-120"/>
+              </a:rPr>
+              <a:t>Līlāvatī</a:t>
+            </a:r>
+            <a:pPr algn="l" indent="0" marL="0">
+              <a:lnSpc>
+                <a:spcPts val="1620"/>
+              </a:lnSpc>
+              <a:spcAft>
+                <a:spcPts val="300"/>
+              </a:spcAft>
+              <a:buNone/>
+            </a:pPr>
+            <a:r>
+              <a:rPr lang="en-US" sz="1200" dirty="0">
+                <a:solidFill>
+                  <a:srgbClr val="1A1A1A"/>
+                </a:solidFill>
+                <a:latin typeface="Georgia" pitchFamily="34" charset="0"/>
+                <a:ea typeface="Georgia" pitchFamily="34" charset="-122"/>
+                <a:cs typeface="Georgia" pitchFamily="34" charset="-120"/>
+              </a:rPr>
+              <a:t> in English translation</a:t>
+            </a:r>
+            <a:endParaRPr lang="en-US" sz="1200" dirty="0"/>
+          </a:p>
+          <a:p>
+            <a:pPr algn="l" marL="342900" indent="-342900">
+              <a:lnSpc>
+                <a:spcPts val="1620"/>
+              </a:lnSpc>
+              <a:spcAft>
+                <a:spcPts val="300"/>
+              </a:spcAft>
+              <a:buSzPct val="100000"/>
+              <a:buChar char="•"/>
+            </a:pPr>
+            <a:r>
+              <a:rPr lang="en-US" sz="1200" dirty="0">
+                <a:solidFill>
+                  <a:srgbClr val="1A1A1A"/>
+                </a:solidFill>
+                <a:latin typeface="Georgia" pitchFamily="34" charset="0"/>
+                <a:ea typeface="Georgia" pitchFamily="34" charset="-122"/>
+                <a:cs typeface="Georgia" pitchFamily="34" charset="-120"/>
+              </a:rPr>
+              <a:t>Printed handout: statement of Mādhava's series for π</a:t>
+            </a:r>
+            <a:endParaRPr lang="en-US" sz="1200" dirty="0"/>
+          </a:p>
+        </p:txBody>
+      </p:sp>
+      <p:sp>
+        <p:nvSpPr>
+          <p:cNvPr id="5" name="Text 3"/>
           <p:cNvSpPr/>
           <p:nvPr/>
         </p:nvSpPr>
@@ -2778,7 +3773,7 @@
                 <a:ea typeface="Times New Roman" pitchFamily="34" charset="-122"/>
                 <a:cs typeface="Times New Roman" pitchFamily="34" charset="-120"/>
               </a:rPr>
-              <a:t>Warm-up (5 min)</a:t>
+              <a:t>Flow</a:t>
             </a:r>
             <a:endParaRPr lang="en-US" sz="1800" dirty="0"/>
           </a:p>
@@ -2787,54 +3782,6 @@
       <p:sp>
         <p:nvSpPr>
           <p:cNvPr id="4" name="Text 2"/>
-          <p:cNvSpPr/>
-          <p:nvPr/>
-        </p:nvSpPr>
-        <p:spPr>
-          <a:xfrm>
-            <a:off x="406301" y="870942"/>
-            <a:ext cx="8498026" cy="213271"/>
-          </a:xfrm>
-          <a:prstGeom prst="rect">
-            <a:avLst/>
-          </a:prstGeom>
-          <a:noFill/>
-          <a:ln/>
-        </p:spPr>
-        <p:txBody>
-          <a:bodyPr wrap="square" lIns="0" tIns="0" rIns="0" bIns="0" rtlCol="0" anchor="t"/>
-          <a:lstStyle/>
-          <a:p>
-            <a:pPr algn="l" indent="0" marL="0">
-              <a:lnSpc>
-                <a:spcPts val="1680"/>
-              </a:lnSpc>
-              <a:spcBef>
-                <a:spcPts val="300"/>
-              </a:spcBef>
-              <a:spcAft>
-                <a:spcPts val="300"/>
-              </a:spcAft>
-              <a:buNone/>
-            </a:pPr>
-            <a:r>
-              <a:rPr lang="en-US" sz="1200" dirty="0">
-                <a:solidFill>
-                  <a:srgbClr val="1A1A1A"/>
-                </a:solidFill>
-                <a:latin typeface="Georgia" pitchFamily="34" charset="0"/>
-                <a:ea typeface="Georgia" pitchFamily="34" charset="-122"/>
-                <a:cs typeface="Georgia" pitchFamily="34" charset="-120"/>
-              </a:rPr>
-              <a:t>Recall: name 3 Indian mathematical contributions (from Day 6 of Middle Module 1, if students did it; or fresh recall).</a:t>
-            </a:r>
-            <a:endParaRPr lang="en-US" sz="1200" dirty="0"/>
-          </a:p>
-        </p:txBody>
-      </p:sp>
-      <p:sp>
-        <p:nvSpPr>
-          <p:cNvPr id="5" name="Text 3"/>
           <p:cNvSpPr/>
           <p:nvPr/>
         </p:nvSpPr>
@@ -2984,7 +3931,7 @@
                 <a:ea typeface="Times New Roman" pitchFamily="34" charset="-122"/>
                 <a:cs typeface="Times New Roman" pitchFamily="34" charset="-120"/>
               </a:rPr>
-              <a:t>Core (25 min)</a:t>
+              <a:t>Warm-up (5 min)</a:t>
             </a:r>
             <a:endParaRPr lang="en-US" sz="1800" dirty="0"/>
           </a:p>
@@ -2998,8 +3945,8 @@
         </p:nvSpPr>
         <p:spPr>
           <a:xfrm>
-            <a:off x="634901" y="883593"/>
-            <a:ext cx="8102798" cy="281880"/>
+            <a:off x="406301" y="870942"/>
+            <a:ext cx="8498026" cy="213271"/>
           </a:xfrm>
           <a:prstGeom prst="rect">
             <a:avLst/>
@@ -3011,31 +3958,13 @@
           <a:bodyPr wrap="square" lIns="0" tIns="0" rIns="0" bIns="0" rtlCol="0" anchor="t"/>
           <a:lstStyle/>
           <a:p>
-            <a:pPr algn="l" marL="342900" indent="-342900">
-              <a:lnSpc>
-                <a:spcPts val="1620"/>
-              </a:lnSpc>
-              <a:spcAft>
-                <a:spcPts val="300"/>
-              </a:spcAft>
-              <a:buSzPct val="100000"/>
-              <a:buChar char="•"/>
-            </a:pPr>
-            <a:r>
-              <a:rPr lang="en-US" sz="1200" b="1" dirty="0">
-                <a:solidFill>
-                  <a:srgbClr val="1A1A1A"/>
-                </a:solidFill>
-                <a:latin typeface="Georgia" pitchFamily="34" charset="0"/>
-                <a:ea typeface="Georgia" pitchFamily="34" charset="-122"/>
-                <a:cs typeface="Georgia" pitchFamily="34" charset="-120"/>
-              </a:rPr>
-              <a:t>The Bakhshali manuscript</a:t>
-            </a:r>
             <a:pPr algn="l" indent="0" marL="0">
               <a:lnSpc>
-                <a:spcPts val="1620"/>
-              </a:lnSpc>
+                <a:spcPts val="1680"/>
+              </a:lnSpc>
+              <a:spcBef>
+                <a:spcPts val="300"/>
+              </a:spcBef>
               <a:spcAft>
                 <a:spcPts val="300"/>
               </a:spcAft>
@@ -3050,7 +3979,7 @@
                 <a:ea typeface="Georgia" pitchFamily="34" charset="-122"/>
                 <a:cs typeface="Georgia" pitchFamily="34" charset="-120"/>
               </a:rPr>
-              <a:t> (~7th c. CE — fragments possibly earlier).</a:t>
+              <a:t>Recall: name 3 Indian mathematical contributions (from Day 6 of Middle Module 1, if students did it; or fresh recall).</a:t>
             </a:r>
             <a:endParaRPr lang="en-US" sz="1200" dirty="0"/>
           </a:p>
@@ -3059,546 +3988,6 @@
       <p:sp>
         <p:nvSpPr>
           <p:cNvPr id="5" name="Text 3"/>
-          <p:cNvSpPr/>
-          <p:nvPr/>
-        </p:nvSpPr>
-        <p:spPr>
-          <a:xfrm>
-            <a:off x="406301" y="1254323"/>
-            <a:ext cx="8498026" cy="639812"/>
-          </a:xfrm>
-          <a:prstGeom prst="rect">
-            <a:avLst/>
-          </a:prstGeom>
-          <a:noFill/>
-          <a:ln/>
-        </p:spPr>
-        <p:txBody>
-          <a:bodyPr wrap="square" lIns="0" tIns="0" rIns="0" bIns="0" rtlCol="0" anchor="t"/>
-          <a:lstStyle/>
-          <a:p>
-            <a:pPr algn="l" indent="0" marL="0">
-              <a:lnSpc>
-                <a:spcPts val="1680"/>
-              </a:lnSpc>
-              <a:spcBef>
-                <a:spcPts val="300"/>
-              </a:spcBef>
-              <a:spcAft>
-                <a:spcPts val="300"/>
-              </a:spcAft>
-              <a:buNone/>
-            </a:pPr>
-            <a:r>
-              <a:rPr lang="en-US" sz="1200" dirty="0">
-                <a:solidFill>
-                  <a:srgbClr val="1A1A1A"/>
-                </a:solidFill>
-                <a:latin typeface="Georgia" pitchFamily="34" charset="0"/>
-                <a:ea typeface="Georgia" pitchFamily="34" charset="-122"/>
-                <a:cs typeface="Georgia" pitchFamily="34" charset="-120"/>
-              </a:rPr>
-              <a:t>– Birch-bark manuscript discovered in 1881. – Contains the earliest known use of zero as a number with a dot symbol. – Word problems on arithmetic, equations. - </a:t>
-            </a:r>
-            <a:pPr algn="l" indent="0" marL="0">
-              <a:lnSpc>
-                <a:spcPts val="1680"/>
-              </a:lnSpc>
-              <a:spcBef>
-                <a:spcPts val="300"/>
-              </a:spcBef>
-              <a:spcAft>
-                <a:spcPts val="300"/>
-              </a:spcAft>
-              <a:buNone/>
-            </a:pPr>
-            <a:r>
-              <a:rPr lang="en-US" sz="1200" b="1" dirty="0">
-                <a:solidFill>
-                  <a:srgbClr val="1A1A1A"/>
-                </a:solidFill>
-                <a:latin typeface="Georgia" pitchFamily="34" charset="0"/>
-                <a:ea typeface="Georgia" pitchFamily="34" charset="-122"/>
-                <a:cs typeface="Georgia" pitchFamily="34" charset="-120"/>
-              </a:rPr>
-              <a:t>Why it matters:</a:t>
-            </a:r>
-            <a:pPr algn="l" indent="0" marL="0">
-              <a:lnSpc>
-                <a:spcPts val="1680"/>
-              </a:lnSpc>
-              <a:spcBef>
-                <a:spcPts val="300"/>
-              </a:spcBef>
-              <a:spcAft>
-                <a:spcPts val="300"/>
-              </a:spcAft>
-              <a:buNone/>
-            </a:pPr>
-            <a:r>
-              <a:rPr lang="en-US" sz="1200" dirty="0">
-                <a:solidFill>
-                  <a:srgbClr val="1A1A1A"/>
-                </a:solidFill>
-                <a:latin typeface="Georgia" pitchFamily="34" charset="0"/>
-                <a:ea typeface="Georgia" pitchFamily="34" charset="-122"/>
-                <a:cs typeface="Georgia" pitchFamily="34" charset="-120"/>
-              </a:rPr>
-              <a:t> documents Indian arithmetic ~500 years before European adoption.</a:t>
-            </a:r>
-            <a:endParaRPr lang="en-US" sz="1200" dirty="0"/>
-          </a:p>
-        </p:txBody>
-      </p:sp>
-      <p:sp>
-        <p:nvSpPr>
-          <p:cNvPr id="6" name="Text 4"/>
-          <p:cNvSpPr/>
-          <p:nvPr/>
-        </p:nvSpPr>
-        <p:spPr>
-          <a:xfrm>
-            <a:off x="634901" y="1982986"/>
-            <a:ext cx="8102798" cy="281880"/>
-          </a:xfrm>
-          <a:prstGeom prst="rect">
-            <a:avLst/>
-          </a:prstGeom>
-          <a:noFill/>
-          <a:ln/>
-        </p:spPr>
-        <p:txBody>
-          <a:bodyPr wrap="square" lIns="0" tIns="0" rIns="0" bIns="0" rtlCol="0" anchor="t"/>
-          <a:lstStyle/>
-          <a:p>
-            <a:pPr algn="l" marL="342900" indent="-342900">
-              <a:lnSpc>
-                <a:spcPts val="1620"/>
-              </a:lnSpc>
-              <a:spcAft>
-                <a:spcPts val="300"/>
-              </a:spcAft>
-              <a:buSzPct val="100000"/>
-              <a:buChar char="•"/>
-            </a:pPr>
-            <a:r>
-              <a:rPr lang="en-US" sz="1200" b="1" dirty="0">
-                <a:solidFill>
-                  <a:srgbClr val="1A1A1A"/>
-                </a:solidFill>
-                <a:latin typeface="Georgia" pitchFamily="34" charset="0"/>
-                <a:ea typeface="Georgia" pitchFamily="34" charset="-122"/>
-                <a:cs typeface="Georgia" pitchFamily="34" charset="-120"/>
-              </a:rPr>
-              <a:t>Bhāskara II (1114–1185 CE).</a:t>
-            </a:r>
-            <a:pPr algn="l" indent="0" marL="0">
-              <a:lnSpc>
-                <a:spcPts val="1620"/>
-              </a:lnSpc>
-              <a:spcAft>
-                <a:spcPts val="300"/>
-              </a:spcAft>
-              <a:buNone/>
-            </a:pPr>
-            <a:r>
-              <a:rPr lang="en-US" sz="1200" dirty="0">
-                <a:solidFill>
-                  <a:srgbClr val="1A1A1A"/>
-                </a:solidFill>
-                <a:latin typeface="Georgia" pitchFamily="34" charset="0"/>
-                <a:ea typeface="Georgia" pitchFamily="34" charset="-122"/>
-                <a:cs typeface="Georgia" pitchFamily="34" charset="-120"/>
-              </a:rPr>
-              <a:t> </a:t>
-            </a:r>
-            <a:pPr algn="l" indent="0" marL="0">
-              <a:lnSpc>
-                <a:spcPts val="1620"/>
-              </a:lnSpc>
-              <a:spcAft>
-                <a:spcPts val="300"/>
-              </a:spcAft>
-              <a:buNone/>
-            </a:pPr>
-            <a:r>
-              <a:rPr lang="en-US" sz="1200" i="1" dirty="0">
-                <a:solidFill>
-                  <a:srgbClr val="1A1A1A"/>
-                </a:solidFill>
-                <a:latin typeface="Georgia" pitchFamily="34" charset="0"/>
-                <a:ea typeface="Georgia" pitchFamily="34" charset="-122"/>
-                <a:cs typeface="Georgia" pitchFamily="34" charset="-120"/>
-              </a:rPr>
-              <a:t>Līlāvatī</a:t>
-            </a:r>
-            <a:pPr algn="l" indent="0" marL="0">
-              <a:lnSpc>
-                <a:spcPts val="1620"/>
-              </a:lnSpc>
-              <a:spcAft>
-                <a:spcPts val="300"/>
-              </a:spcAft>
-              <a:buNone/>
-            </a:pPr>
-            <a:r>
-              <a:rPr lang="en-US" sz="1200" dirty="0">
-                <a:solidFill>
-                  <a:srgbClr val="1A1A1A"/>
-                </a:solidFill>
-                <a:latin typeface="Georgia" pitchFamily="34" charset="0"/>
-                <a:ea typeface="Georgia" pitchFamily="34" charset="-122"/>
-                <a:cs typeface="Georgia" pitchFamily="34" charset="-120"/>
-              </a:rPr>
-              <a:t> and </a:t>
-            </a:r>
-            <a:pPr algn="l" indent="0" marL="0">
-              <a:lnSpc>
-                <a:spcPts val="1620"/>
-              </a:lnSpc>
-              <a:spcAft>
-                <a:spcPts val="300"/>
-              </a:spcAft>
-              <a:buNone/>
-            </a:pPr>
-            <a:r>
-              <a:rPr lang="en-US" sz="1200" i="1" dirty="0">
-                <a:solidFill>
-                  <a:srgbClr val="1A1A1A"/>
-                </a:solidFill>
-                <a:latin typeface="Georgia" pitchFamily="34" charset="0"/>
-                <a:ea typeface="Georgia" pitchFamily="34" charset="-122"/>
-                <a:cs typeface="Georgia" pitchFamily="34" charset="-120"/>
-              </a:rPr>
-              <a:t>Bījagaṇita</a:t>
-            </a:r>
-            <a:pPr algn="l" indent="0" marL="0">
-              <a:lnSpc>
-                <a:spcPts val="1620"/>
-              </a:lnSpc>
-              <a:spcAft>
-                <a:spcPts val="300"/>
-              </a:spcAft>
-              <a:buNone/>
-            </a:pPr>
-            <a:r>
-              <a:rPr lang="en-US" sz="1200" dirty="0">
-                <a:solidFill>
-                  <a:srgbClr val="1A1A1A"/>
-                </a:solidFill>
-                <a:latin typeface="Georgia" pitchFamily="34" charset="0"/>
-                <a:ea typeface="Georgia" pitchFamily="34" charset="-122"/>
-                <a:cs typeface="Georgia" pitchFamily="34" charset="-120"/>
-              </a:rPr>
-              <a:t>.</a:t>
-            </a:r>
-            <a:endParaRPr lang="en-US" sz="1200" dirty="0"/>
-          </a:p>
-        </p:txBody>
-      </p:sp>
-      <p:sp>
-        <p:nvSpPr>
-          <p:cNvPr id="7" name="Text 5"/>
-          <p:cNvSpPr/>
-          <p:nvPr/>
-        </p:nvSpPr>
-        <p:spPr>
-          <a:xfrm>
-            <a:off x="406301" y="2353717"/>
-            <a:ext cx="8498026" cy="639812"/>
-          </a:xfrm>
-          <a:prstGeom prst="rect">
-            <a:avLst/>
-          </a:prstGeom>
-          <a:noFill/>
-          <a:ln/>
-        </p:spPr>
-        <p:txBody>
-          <a:bodyPr wrap="square" lIns="0" tIns="0" rIns="0" bIns="0" rtlCol="0" anchor="t"/>
-          <a:lstStyle/>
-          <a:p>
-            <a:pPr algn="l" indent="0" marL="0">
-              <a:lnSpc>
-                <a:spcPts val="1680"/>
-              </a:lnSpc>
-              <a:spcBef>
-                <a:spcPts val="300"/>
-              </a:spcBef>
-              <a:spcAft>
-                <a:spcPts val="300"/>
-              </a:spcAft>
-              <a:buNone/>
-            </a:pPr>
-            <a:r>
-              <a:rPr lang="en-US" sz="1200" dirty="0">
-                <a:solidFill>
-                  <a:srgbClr val="1A1A1A"/>
-                </a:solidFill>
-                <a:latin typeface="Georgia" pitchFamily="34" charset="0"/>
-                <a:ea typeface="Georgia" pitchFamily="34" charset="-122"/>
-                <a:cs typeface="Georgia" pitchFamily="34" charset="-120"/>
-              </a:rPr>
-              <a:t>– Arithmetic, algebra, geometry, mensuration. – Solved Pell's equation (the equation </a:t>
-            </a:r>
-            <a:pPr algn="l" indent="0" marL="0">
-              <a:lnSpc>
-                <a:spcPts val="1680"/>
-              </a:lnSpc>
-              <a:spcBef>
-                <a:spcPts val="300"/>
-              </a:spcBef>
-              <a:spcAft>
-                <a:spcPts val="300"/>
-              </a:spcAft>
-              <a:buNone/>
-            </a:pPr>
-            <a:r>
-              <a:rPr lang="en-US" sz="1200" i="1" dirty="0">
-                <a:solidFill>
-                  <a:srgbClr val="1A1A1A"/>
-                </a:solidFill>
-                <a:latin typeface="Georgia" pitchFamily="34" charset="0"/>
-                <a:ea typeface="Georgia" pitchFamily="34" charset="-122"/>
-                <a:cs typeface="Georgia" pitchFamily="34" charset="-120"/>
-              </a:rPr>
-              <a:t>x² − Ny² = 1</a:t>
-            </a:r>
-            <a:pPr algn="l" indent="0" marL="0">
-              <a:lnSpc>
-                <a:spcPts val="1680"/>
-              </a:lnSpc>
-              <a:spcBef>
-                <a:spcPts val="300"/>
-              </a:spcBef>
-              <a:spcAft>
-                <a:spcPts val="300"/>
-              </a:spcAft>
-              <a:buNone/>
-            </a:pPr>
-            <a:r>
-              <a:rPr lang="en-US" sz="1200" dirty="0">
-                <a:solidFill>
-                  <a:srgbClr val="1A1A1A"/>
-                </a:solidFill>
-                <a:latin typeface="Georgia" pitchFamily="34" charset="0"/>
-                <a:ea typeface="Georgia" pitchFamily="34" charset="-122"/>
-                <a:cs typeface="Georgia" pitchFamily="34" charset="-120"/>
-              </a:rPr>
-              <a:t>) centuries before Pell himself (1650s). – Introduced cycle methods for indeterminate equations. – Read aloud one </a:t>
-            </a:r>
-            <a:pPr algn="l" indent="0" marL="0">
-              <a:lnSpc>
-                <a:spcPts val="1680"/>
-              </a:lnSpc>
-              <a:spcBef>
-                <a:spcPts val="300"/>
-              </a:spcBef>
-              <a:spcAft>
-                <a:spcPts val="300"/>
-              </a:spcAft>
-              <a:buNone/>
-            </a:pPr>
-            <a:r>
-              <a:rPr lang="en-US" sz="1200" i="1" dirty="0">
-                <a:solidFill>
-                  <a:srgbClr val="1A1A1A"/>
-                </a:solidFill>
-                <a:latin typeface="Georgia" pitchFamily="34" charset="0"/>
-                <a:ea typeface="Georgia" pitchFamily="34" charset="-122"/>
-                <a:cs typeface="Georgia" pitchFamily="34" charset="-120"/>
-              </a:rPr>
-              <a:t>Līlāvatī</a:t>
-            </a:r>
-            <a:pPr algn="l" indent="0" marL="0">
-              <a:lnSpc>
-                <a:spcPts val="1680"/>
-              </a:lnSpc>
-              <a:spcBef>
-                <a:spcPts val="300"/>
-              </a:spcBef>
-              <a:spcAft>
-                <a:spcPts val="300"/>
-              </a:spcAft>
-              <a:buNone/>
-            </a:pPr>
-            <a:r>
-              <a:rPr lang="en-US" sz="1200" dirty="0">
-                <a:solidFill>
-                  <a:srgbClr val="1A1A1A"/>
-                </a:solidFill>
-                <a:latin typeface="Georgia" pitchFamily="34" charset="0"/>
-                <a:ea typeface="Georgia" pitchFamily="34" charset="-122"/>
-                <a:cs typeface="Georgia" pitchFamily="34" charset="-120"/>
-              </a:rPr>
-              <a:t> word problem (e.g. the swan problem).</a:t>
-            </a:r>
-            <a:endParaRPr lang="en-US" sz="1200" dirty="0"/>
-          </a:p>
-        </p:txBody>
-      </p:sp>
-      <p:sp>
-        <p:nvSpPr>
-          <p:cNvPr id="8" name="Text 6"/>
-          <p:cNvSpPr/>
-          <p:nvPr/>
-        </p:nvSpPr>
-        <p:spPr>
-          <a:xfrm>
-            <a:off x="634901" y="3082379"/>
-            <a:ext cx="8102798" cy="281880"/>
-          </a:xfrm>
-          <a:prstGeom prst="rect">
-            <a:avLst/>
-          </a:prstGeom>
-          <a:noFill/>
-          <a:ln/>
-        </p:spPr>
-        <p:txBody>
-          <a:bodyPr wrap="square" lIns="0" tIns="0" rIns="0" bIns="0" rtlCol="0" anchor="t"/>
-          <a:lstStyle/>
-          <a:p>
-            <a:pPr algn="l" marL="342900" indent="-342900">
-              <a:lnSpc>
-                <a:spcPts val="1620"/>
-              </a:lnSpc>
-              <a:spcAft>
-                <a:spcPts val="300"/>
-              </a:spcAft>
-              <a:buSzPct val="100000"/>
-              <a:buChar char="•"/>
-            </a:pPr>
-            <a:r>
-              <a:rPr lang="en-US" sz="1200" b="1" dirty="0">
-                <a:solidFill>
-                  <a:srgbClr val="1A1A1A"/>
-                </a:solidFill>
-                <a:latin typeface="Georgia" pitchFamily="34" charset="0"/>
-                <a:ea typeface="Georgia" pitchFamily="34" charset="-122"/>
-                <a:cs typeface="Georgia" pitchFamily="34" charset="-120"/>
-              </a:rPr>
-              <a:t>Mādhava of Saṅgamagrāma (~1340–1425 CE).</a:t>
-            </a:r>
-            <a:pPr algn="l" indent="0" marL="0">
-              <a:lnSpc>
-                <a:spcPts val="1620"/>
-              </a:lnSpc>
-              <a:spcAft>
-                <a:spcPts val="300"/>
-              </a:spcAft>
-              <a:buNone/>
-            </a:pPr>
-            <a:r>
-              <a:rPr lang="en-US" sz="1200" dirty="0">
-                <a:solidFill>
-                  <a:srgbClr val="1A1A1A"/>
-                </a:solidFill>
-                <a:latin typeface="Georgia" pitchFamily="34" charset="0"/>
-                <a:ea typeface="Georgia" pitchFamily="34" charset="-122"/>
-                <a:cs typeface="Georgia" pitchFamily="34" charset="-120"/>
-              </a:rPr>
-              <a:t> Kerala school of mathematics.</a:t>
-            </a:r>
-            <a:endParaRPr lang="en-US" sz="1200" dirty="0"/>
-          </a:p>
-        </p:txBody>
-      </p:sp>
-      <p:sp>
-        <p:nvSpPr>
-          <p:cNvPr id="9" name="Text 7"/>
-          <p:cNvSpPr/>
-          <p:nvPr/>
-        </p:nvSpPr>
-        <p:spPr>
-          <a:xfrm>
-            <a:off x="406301" y="3453110"/>
-            <a:ext cx="8498026" cy="639812"/>
-          </a:xfrm>
-          <a:prstGeom prst="rect">
-            <a:avLst/>
-          </a:prstGeom>
-          <a:noFill/>
-          <a:ln/>
-        </p:spPr>
-        <p:txBody>
-          <a:bodyPr wrap="square" lIns="0" tIns="0" rIns="0" bIns="0" rtlCol="0" anchor="t"/>
-          <a:lstStyle/>
-          <a:p>
-            <a:pPr algn="l" indent="0" marL="0">
-              <a:lnSpc>
-                <a:spcPts val="1680"/>
-              </a:lnSpc>
-              <a:spcBef>
-                <a:spcPts val="300"/>
-              </a:spcBef>
-              <a:spcAft>
-                <a:spcPts val="300"/>
-              </a:spcAft>
-              <a:buNone/>
-            </a:pPr>
-            <a:r>
-              <a:rPr lang="en-US" sz="1200" dirty="0">
-                <a:solidFill>
-                  <a:srgbClr val="1A1A1A"/>
-                </a:solidFill>
-                <a:latin typeface="Georgia" pitchFamily="34" charset="0"/>
-                <a:ea typeface="Georgia" pitchFamily="34" charset="-122"/>
-                <a:cs typeface="Georgia" pitchFamily="34" charset="-120"/>
-              </a:rPr>
-              <a:t>– Infinite series for π: $\pi/4 = 1 - 1/3 + 1/5 - 1/7 + ...$ (now sometimes called Madhava-Leibniz series). – Series for sine, cosine, arctan. – Came very close to calculus (~250 years before Newton and Leibniz). - </a:t>
-            </a:r>
-            <a:pPr algn="l" indent="0" marL="0">
-              <a:lnSpc>
-                <a:spcPts val="1680"/>
-              </a:lnSpc>
-              <a:spcBef>
-                <a:spcPts val="300"/>
-              </a:spcBef>
-              <a:spcAft>
-                <a:spcPts val="300"/>
-              </a:spcAft>
-              <a:buNone/>
-            </a:pPr>
-            <a:r>
-              <a:rPr lang="en-US" sz="1200" b="1" dirty="0">
-                <a:solidFill>
-                  <a:srgbClr val="1A1A1A"/>
-                </a:solidFill>
-                <a:latin typeface="Georgia" pitchFamily="34" charset="0"/>
-                <a:ea typeface="Georgia" pitchFamily="34" charset="-122"/>
-                <a:cs typeface="Georgia" pitchFamily="34" charset="-120"/>
-              </a:rPr>
-              <a:t>What he did NOT do:</a:t>
-            </a:r>
-            <a:pPr algn="l" indent="0" marL="0">
-              <a:lnSpc>
-                <a:spcPts val="1680"/>
-              </a:lnSpc>
-              <a:spcBef>
-                <a:spcPts val="300"/>
-              </a:spcBef>
-              <a:spcAft>
-                <a:spcPts val="300"/>
-              </a:spcAft>
-              <a:buNone/>
-            </a:pPr>
-            <a:r>
-              <a:rPr lang="en-US" sz="1200" dirty="0">
-                <a:solidFill>
-                  <a:srgbClr val="1A1A1A"/>
-                </a:solidFill>
-                <a:latin typeface="Georgia" pitchFamily="34" charset="0"/>
-                <a:ea typeface="Georgia" pitchFamily="34" charset="-122"/>
-                <a:cs typeface="Georgia" pitchFamily="34" charset="-120"/>
-              </a:rPr>
-              <a:t> did not develop the fundamental theorem of calculus formally; did not unify the series approach with a differential framework.</a:t>
-            </a:r>
-            <a:endParaRPr lang="en-US" sz="1200" dirty="0"/>
-          </a:p>
-        </p:txBody>
-      </p:sp>
-      <p:sp>
-        <p:nvSpPr>
-          <p:cNvPr id="10" name="Text 8"/>
           <p:cNvSpPr/>
           <p:nvPr/>
         </p:nvSpPr>
@@ -3748,7 +4137,7 @@
                 <a:ea typeface="Times New Roman" pitchFamily="34" charset="-122"/>
                 <a:cs typeface="Times New Roman" pitchFamily="34" charset="-120"/>
               </a:rPr>
-              <a:t>Discussion (10 min)</a:t>
+              <a:t>Core (25 min)</a:t>
             </a:r>
             <a:endParaRPr lang="en-US" sz="1800" dirty="0"/>
           </a:p>
@@ -3763,7 +4152,7 @@
         <p:spPr>
           <a:xfrm>
             <a:off x="634901" y="883593"/>
-            <a:ext cx="8102798" cy="487561"/>
+            <a:ext cx="8102798" cy="281880"/>
           </a:xfrm>
           <a:prstGeom prst="rect">
             <a:avLst/>
@@ -3786,15 +4175,35 @@
               <a:buChar char="•"/>
             </a:pPr>
             <a:r>
-              <a:rPr lang="en-US" sz="1200" i="1" dirty="0">
-                <a:solidFill>
-                  <a:srgbClr val="1A1A1A"/>
-                </a:solidFill>
-                <a:latin typeface="Georgia" pitchFamily="34" charset="0"/>
-                <a:ea typeface="Georgia" pitchFamily="34" charset="-122"/>
-                <a:cs typeface="Georgia" pitchFamily="34" charset="-120"/>
-              </a:rPr>
-              <a:t>"Madhava had infinite series 300 years before Leibniz. So why is the series still called 'Leibniz series' in most textbooks?"</a:t>
+              <a:rPr lang="en-US" sz="1200" b="1" dirty="0">
+                <a:solidFill>
+                  <a:srgbClr val="1A1A1A"/>
+                </a:solidFill>
+                <a:latin typeface="Georgia" pitchFamily="34" charset="0"/>
+                <a:ea typeface="Georgia" pitchFamily="34" charset="-122"/>
+                <a:cs typeface="Georgia" pitchFamily="34" charset="-120"/>
+              </a:rPr>
+              <a:t>The Bakhshali manuscript</a:t>
+            </a:r>
+            <a:pPr algn="l" indent="0" marL="0">
+              <a:lnSpc>
+                <a:spcPts val="1620"/>
+              </a:lnSpc>
+              <a:spcAft>
+                <a:spcPts val="300"/>
+              </a:spcAft>
+              <a:buNone/>
+            </a:pPr>
+            <a:r>
+              <a:rPr lang="en-US" sz="1200" dirty="0">
+                <a:solidFill>
+                  <a:srgbClr val="1A1A1A"/>
+                </a:solidFill>
+                <a:latin typeface="Georgia" pitchFamily="34" charset="0"/>
+                <a:ea typeface="Georgia" pitchFamily="34" charset="-122"/>
+                <a:cs typeface="Georgia" pitchFamily="34" charset="-120"/>
+              </a:rPr>
+              <a:t> (~7th c. CE — fragments possibly earlier).</a:t>
             </a:r>
             <a:endParaRPr lang="en-US" sz="1200" dirty="0"/>
           </a:p>
@@ -3808,8 +4217,8 @@
         </p:nvSpPr>
         <p:spPr>
           <a:xfrm>
-            <a:off x="406301" y="1460004"/>
-            <a:ext cx="8498026" cy="639812"/>
+            <a:off x="634901" y="1266974"/>
+            <a:ext cx="8102798" cy="1013222"/>
           </a:xfrm>
           <a:prstGeom prst="rect">
             <a:avLst/>
@@ -3821,13 +4230,103 @@
           <a:bodyPr wrap="square" lIns="0" tIns="0" rIns="0" bIns="0" rtlCol="0" anchor="t"/>
           <a:lstStyle/>
           <a:p>
+            <a:pPr algn="l" marL="342900" indent="-342900">
+              <a:lnSpc>
+                <a:spcPts val="1620"/>
+              </a:lnSpc>
+              <a:spcAft>
+                <a:spcPts val="300"/>
+              </a:spcAft>
+              <a:buSzPct val="100000"/>
+              <a:buChar char="•"/>
+            </a:pPr>
+            <a:r>
+              <a:rPr lang="en-US" sz="1200" dirty="0">
+                <a:solidFill>
+                  <a:srgbClr val="1A1A1A"/>
+                </a:solidFill>
+                <a:latin typeface="Georgia" pitchFamily="34" charset="0"/>
+                <a:ea typeface="Georgia" pitchFamily="34" charset="-122"/>
+                <a:cs typeface="Georgia" pitchFamily="34" charset="-120"/>
+              </a:rPr>
+              <a:t>Birch-bark manuscript discovered in 1881.</a:t>
+            </a:r>
+            <a:endParaRPr lang="en-US" sz="1200" dirty="0"/>
+          </a:p>
+          <a:p>
+            <a:pPr algn="l" marL="342900" indent="-342900">
+              <a:lnSpc>
+                <a:spcPts val="1620"/>
+              </a:lnSpc>
+              <a:spcAft>
+                <a:spcPts val="300"/>
+              </a:spcAft>
+              <a:buSzPct val="100000"/>
+              <a:buChar char="•"/>
+            </a:pPr>
+            <a:r>
+              <a:rPr lang="en-US" sz="1200" dirty="0">
+                <a:solidFill>
+                  <a:srgbClr val="1A1A1A"/>
+                </a:solidFill>
+                <a:latin typeface="Georgia" pitchFamily="34" charset="0"/>
+                <a:ea typeface="Georgia" pitchFamily="34" charset="-122"/>
+                <a:cs typeface="Georgia" pitchFamily="34" charset="-120"/>
+              </a:rPr>
+              <a:t>Contains the earliest known use of zero as a number with a dot symbol.</a:t>
+            </a:r>
+            <a:endParaRPr lang="en-US" sz="1200" dirty="0"/>
+          </a:p>
+          <a:p>
+            <a:pPr algn="l" marL="342900" indent="-342900">
+              <a:lnSpc>
+                <a:spcPts val="1620"/>
+              </a:lnSpc>
+              <a:spcAft>
+                <a:spcPts val="300"/>
+              </a:spcAft>
+              <a:buSzPct val="100000"/>
+              <a:buChar char="•"/>
+            </a:pPr>
+            <a:r>
+              <a:rPr lang="en-US" sz="1200" dirty="0">
+                <a:solidFill>
+                  <a:srgbClr val="1A1A1A"/>
+                </a:solidFill>
+                <a:latin typeface="Georgia" pitchFamily="34" charset="0"/>
+                <a:ea typeface="Georgia" pitchFamily="34" charset="-122"/>
+                <a:cs typeface="Georgia" pitchFamily="34" charset="-120"/>
+              </a:rPr>
+              <a:t>Word problems on arithmetic, equations.</a:t>
+            </a:r>
+            <a:endParaRPr lang="en-US" sz="1200" dirty="0"/>
+          </a:p>
+          <a:p>
+            <a:pPr algn="l" marL="342900" indent="-342900">
+              <a:lnSpc>
+                <a:spcPts val="1620"/>
+              </a:lnSpc>
+              <a:spcAft>
+                <a:spcPts val="300"/>
+              </a:spcAft>
+              <a:buSzPct val="100000"/>
+              <a:buChar char="•"/>
+            </a:pPr>
+            <a:r>
+              <a:rPr lang="en-US" sz="1200" b="1" dirty="0">
+                <a:solidFill>
+                  <a:srgbClr val="1A1A1A"/>
+                </a:solidFill>
+                <a:latin typeface="Georgia" pitchFamily="34" charset="0"/>
+                <a:ea typeface="Georgia" pitchFamily="34" charset="-122"/>
+                <a:cs typeface="Georgia" pitchFamily="34" charset="-120"/>
+              </a:rPr>
+              <a:t>Why it matters:</a:t>
+            </a:r>
             <a:pPr algn="l" indent="0" marL="0">
               <a:lnSpc>
-                <a:spcPts val="1680"/>
-              </a:lnSpc>
-              <a:spcBef>
-                <a:spcPts val="300"/>
-              </a:spcBef>
+                <a:spcPts val="1620"/>
+              </a:lnSpc>
               <a:spcAft>
                 <a:spcPts val="300"/>
               </a:spcAft>
@@ -3842,7 +4341,7 @@
                 <a:ea typeface="Georgia" pitchFamily="34" charset="-122"/>
                 <a:cs typeface="Georgia" pitchFamily="34" charset="-120"/>
               </a:rPr>
-              <a:t>– Possible answers: European mathematical literature was the dominant pipeline; Kerala school's work was not translated to European languages until much later; cite-attribution is conservative. – The corrective: modern math history is increasingly using "Madhava-Leibniz series" — a real, slow correction.</a:t>
+              <a:t> documents Indian arithmetic ~500 years before European adoption.</a:t>
             </a:r>
             <a:endParaRPr lang="en-US" sz="1200" dirty="0"/>
           </a:p>
@@ -4000,7 +4499,7 @@
                 <a:ea typeface="Times New Roman" pitchFamily="34" charset="-122"/>
                 <a:cs typeface="Times New Roman" pitchFamily="34" charset="-120"/>
               </a:rPr>
-              <a:t>Wrap-up (5 min)</a:t>
+              <a:t>Core (25 min) (cont.)</a:t>
             </a:r>
             <a:endParaRPr lang="en-US" sz="1800" dirty="0"/>
           </a:p>
@@ -4014,8 +4513,8 @@
         </p:nvSpPr>
         <p:spPr>
           <a:xfrm>
-            <a:off x="406301" y="870942"/>
-            <a:ext cx="8498026" cy="213271"/>
+            <a:off x="634901" y="883593"/>
+            <a:ext cx="8102798" cy="281880"/>
           </a:xfrm>
           <a:prstGeom prst="rect">
             <a:avLst/>
@@ -4027,13 +4526,31 @@
           <a:bodyPr wrap="square" lIns="0" tIns="0" rIns="0" bIns="0" rtlCol="0" anchor="t"/>
           <a:lstStyle/>
           <a:p>
+            <a:pPr algn="l" marL="342900" indent="-342900">
+              <a:lnSpc>
+                <a:spcPts val="1620"/>
+              </a:lnSpc>
+              <a:spcAft>
+                <a:spcPts val="300"/>
+              </a:spcAft>
+              <a:buSzPct val="100000"/>
+              <a:buChar char="•"/>
+            </a:pPr>
+            <a:r>
+              <a:rPr lang="en-US" sz="1200" b="1" dirty="0">
+                <a:solidFill>
+                  <a:srgbClr val="1A1A1A"/>
+                </a:solidFill>
+                <a:latin typeface="Georgia" pitchFamily="34" charset="0"/>
+                <a:ea typeface="Georgia" pitchFamily="34" charset="-122"/>
+                <a:cs typeface="Georgia" pitchFamily="34" charset="-120"/>
+              </a:rPr>
+              <a:t>Bhāskara II (1114–1185 CE).</a:t>
+            </a:r>
             <a:pPr algn="l" indent="0" marL="0">
               <a:lnSpc>
-                <a:spcPts val="1680"/>
-              </a:lnSpc>
-              <a:spcBef>
-                <a:spcPts val="300"/>
-              </a:spcBef>
+                <a:spcPts val="1620"/>
+              </a:lnSpc>
               <a:spcAft>
                 <a:spcPts val="300"/>
               </a:spcAft>
@@ -4048,15 +4565,12 @@
                 <a:ea typeface="Georgia" pitchFamily="34" charset="-122"/>
                 <a:cs typeface="Georgia" pitchFamily="34" charset="-120"/>
               </a:rPr>
-              <a:t>– Preview Day 5: </a:t>
+              <a:t> </a:t>
             </a:r>
             <a:pPr algn="l" indent="0" marL="0">
               <a:lnSpc>
-                <a:spcPts val="1680"/>
-              </a:lnSpc>
-              <a:spcBef>
-                <a:spcPts val="300"/>
-              </a:spcBef>
+                <a:spcPts val="1620"/>
+              </a:lnSpc>
               <a:spcAft>
                 <a:spcPts val="300"/>
               </a:spcAft>
@@ -4071,7 +4585,67 @@
                 <a:ea typeface="Georgia" pitchFamily="34" charset="-122"/>
                 <a:cs typeface="Georgia" pitchFamily="34" charset="-120"/>
               </a:rPr>
-              <a:t>"Tomorrow — mid-module + paper topic commitment."</a:t>
+              <a:t>Līlāvatī</a:t>
+            </a:r>
+            <a:pPr algn="l" indent="0" marL="0">
+              <a:lnSpc>
+                <a:spcPts val="1620"/>
+              </a:lnSpc>
+              <a:spcAft>
+                <a:spcPts val="300"/>
+              </a:spcAft>
+              <a:buNone/>
+            </a:pPr>
+            <a:r>
+              <a:rPr lang="en-US" sz="1200" dirty="0">
+                <a:solidFill>
+                  <a:srgbClr val="1A1A1A"/>
+                </a:solidFill>
+                <a:latin typeface="Georgia" pitchFamily="34" charset="0"/>
+                <a:ea typeface="Georgia" pitchFamily="34" charset="-122"/>
+                <a:cs typeface="Georgia" pitchFamily="34" charset="-120"/>
+              </a:rPr>
+              <a:t> and </a:t>
+            </a:r>
+            <a:pPr algn="l" indent="0" marL="0">
+              <a:lnSpc>
+                <a:spcPts val="1620"/>
+              </a:lnSpc>
+              <a:spcAft>
+                <a:spcPts val="300"/>
+              </a:spcAft>
+              <a:buNone/>
+            </a:pPr>
+            <a:r>
+              <a:rPr lang="en-US" sz="1200" i="1" dirty="0">
+                <a:solidFill>
+                  <a:srgbClr val="1A1A1A"/>
+                </a:solidFill>
+                <a:latin typeface="Georgia" pitchFamily="34" charset="0"/>
+                <a:ea typeface="Georgia" pitchFamily="34" charset="-122"/>
+                <a:cs typeface="Georgia" pitchFamily="34" charset="-120"/>
+              </a:rPr>
+              <a:t>Bījagaṇita</a:t>
+            </a:r>
+            <a:pPr algn="l" indent="0" marL="0">
+              <a:lnSpc>
+                <a:spcPts val="1620"/>
+              </a:lnSpc>
+              <a:spcAft>
+                <a:spcPts val="300"/>
+              </a:spcAft>
+              <a:buNone/>
+            </a:pPr>
+            <a:r>
+              <a:rPr lang="en-US" sz="1200" dirty="0">
+                <a:solidFill>
+                  <a:srgbClr val="1A1A1A"/>
+                </a:solidFill>
+                <a:latin typeface="Georgia" pitchFamily="34" charset="0"/>
+                <a:ea typeface="Georgia" pitchFamily="34" charset="-122"/>
+                <a:cs typeface="Georgia" pitchFamily="34" charset="-120"/>
+              </a:rPr>
+              <a:t>.</a:t>
             </a:r>
             <a:endParaRPr lang="en-US" sz="1200" dirty="0"/>
           </a:p>
@@ -4080,6 +4654,204 @@
       <p:sp>
         <p:nvSpPr>
           <p:cNvPr id="5" name="Text 3"/>
+          <p:cNvSpPr/>
+          <p:nvPr/>
+        </p:nvSpPr>
+        <p:spPr>
+          <a:xfrm>
+            <a:off x="634901" y="1266974"/>
+            <a:ext cx="8102798" cy="1013222"/>
+          </a:xfrm>
+          <a:prstGeom prst="rect">
+            <a:avLst/>
+          </a:prstGeom>
+          <a:noFill/>
+          <a:ln/>
+        </p:spPr>
+        <p:txBody>
+          <a:bodyPr wrap="square" lIns="0" tIns="0" rIns="0" bIns="0" rtlCol="0" anchor="t"/>
+          <a:lstStyle/>
+          <a:p>
+            <a:pPr algn="l" marL="342900" indent="-342900">
+              <a:lnSpc>
+                <a:spcPts val="1620"/>
+              </a:lnSpc>
+              <a:spcAft>
+                <a:spcPts val="300"/>
+              </a:spcAft>
+              <a:buSzPct val="100000"/>
+              <a:buChar char="•"/>
+            </a:pPr>
+            <a:r>
+              <a:rPr lang="en-US" sz="1200" dirty="0">
+                <a:solidFill>
+                  <a:srgbClr val="1A1A1A"/>
+                </a:solidFill>
+                <a:latin typeface="Georgia" pitchFamily="34" charset="0"/>
+                <a:ea typeface="Georgia" pitchFamily="34" charset="-122"/>
+                <a:cs typeface="Georgia" pitchFamily="34" charset="-120"/>
+              </a:rPr>
+              <a:t>Arithmetic, algebra, geometry, mensuration.</a:t>
+            </a:r>
+            <a:endParaRPr lang="en-US" sz="1200" dirty="0"/>
+          </a:p>
+          <a:p>
+            <a:pPr algn="l" marL="342900" indent="-342900">
+              <a:lnSpc>
+                <a:spcPts val="1620"/>
+              </a:lnSpc>
+              <a:spcAft>
+                <a:spcPts val="300"/>
+              </a:spcAft>
+              <a:buSzPct val="100000"/>
+              <a:buChar char="•"/>
+            </a:pPr>
+            <a:r>
+              <a:rPr lang="en-US" sz="1200" dirty="0">
+                <a:solidFill>
+                  <a:srgbClr val="1A1A1A"/>
+                </a:solidFill>
+                <a:latin typeface="Georgia" pitchFamily="34" charset="0"/>
+                <a:ea typeface="Georgia" pitchFamily="34" charset="-122"/>
+                <a:cs typeface="Georgia" pitchFamily="34" charset="-120"/>
+              </a:rPr>
+              <a:t>Solved Pell's equation (the equation </a:t>
+            </a:r>
+            <a:pPr algn="l" indent="0" marL="0">
+              <a:lnSpc>
+                <a:spcPts val="1620"/>
+              </a:lnSpc>
+              <a:spcAft>
+                <a:spcPts val="300"/>
+              </a:spcAft>
+              <a:buNone/>
+            </a:pPr>
+            <a:r>
+              <a:rPr lang="en-US" sz="1200" i="1" dirty="0">
+                <a:solidFill>
+                  <a:srgbClr val="1A1A1A"/>
+                </a:solidFill>
+                <a:latin typeface="Georgia" pitchFamily="34" charset="0"/>
+                <a:ea typeface="Georgia" pitchFamily="34" charset="-122"/>
+                <a:cs typeface="Georgia" pitchFamily="34" charset="-120"/>
+              </a:rPr>
+              <a:t>x² − Ny² = 1</a:t>
+            </a:r>
+            <a:pPr algn="l" indent="0" marL="0">
+              <a:lnSpc>
+                <a:spcPts val="1620"/>
+              </a:lnSpc>
+              <a:spcAft>
+                <a:spcPts val="300"/>
+              </a:spcAft>
+              <a:buNone/>
+            </a:pPr>
+            <a:r>
+              <a:rPr lang="en-US" sz="1200" dirty="0">
+                <a:solidFill>
+                  <a:srgbClr val="1A1A1A"/>
+                </a:solidFill>
+                <a:latin typeface="Georgia" pitchFamily="34" charset="0"/>
+                <a:ea typeface="Georgia" pitchFamily="34" charset="-122"/>
+                <a:cs typeface="Georgia" pitchFamily="34" charset="-120"/>
+              </a:rPr>
+              <a:t>) centuries before Pell himself (1650s).</a:t>
+            </a:r>
+            <a:endParaRPr lang="en-US" sz="1200" dirty="0"/>
+          </a:p>
+          <a:p>
+            <a:pPr algn="l" marL="342900" indent="-342900">
+              <a:lnSpc>
+                <a:spcPts val="1620"/>
+              </a:lnSpc>
+              <a:spcAft>
+                <a:spcPts val="300"/>
+              </a:spcAft>
+              <a:buSzPct val="100000"/>
+              <a:buChar char="•"/>
+            </a:pPr>
+            <a:r>
+              <a:rPr lang="en-US" sz="1200" dirty="0">
+                <a:solidFill>
+                  <a:srgbClr val="1A1A1A"/>
+                </a:solidFill>
+                <a:latin typeface="Georgia" pitchFamily="34" charset="0"/>
+                <a:ea typeface="Georgia" pitchFamily="34" charset="-122"/>
+                <a:cs typeface="Georgia" pitchFamily="34" charset="-120"/>
+              </a:rPr>
+              <a:t>Introduced cycle methods for indeterminate equations.</a:t>
+            </a:r>
+            <a:endParaRPr lang="en-US" sz="1200" dirty="0"/>
+          </a:p>
+          <a:p>
+            <a:pPr algn="l" marL="342900" indent="-342900">
+              <a:lnSpc>
+                <a:spcPts val="1620"/>
+              </a:lnSpc>
+              <a:spcAft>
+                <a:spcPts val="300"/>
+              </a:spcAft>
+              <a:buSzPct val="100000"/>
+              <a:buChar char="•"/>
+            </a:pPr>
+            <a:r>
+              <a:rPr lang="en-US" sz="1200" dirty="0">
+                <a:solidFill>
+                  <a:srgbClr val="1A1A1A"/>
+                </a:solidFill>
+                <a:latin typeface="Georgia" pitchFamily="34" charset="0"/>
+                <a:ea typeface="Georgia" pitchFamily="34" charset="-122"/>
+                <a:cs typeface="Georgia" pitchFamily="34" charset="-120"/>
+              </a:rPr>
+              <a:t>Read aloud one </a:t>
+            </a:r>
+            <a:pPr algn="l" indent="0" marL="0">
+              <a:lnSpc>
+                <a:spcPts val="1620"/>
+              </a:lnSpc>
+              <a:spcAft>
+                <a:spcPts val="300"/>
+              </a:spcAft>
+              <a:buNone/>
+            </a:pPr>
+            <a:r>
+              <a:rPr lang="en-US" sz="1200" i="1" dirty="0">
+                <a:solidFill>
+                  <a:srgbClr val="1A1A1A"/>
+                </a:solidFill>
+                <a:latin typeface="Georgia" pitchFamily="34" charset="0"/>
+                <a:ea typeface="Georgia" pitchFamily="34" charset="-122"/>
+                <a:cs typeface="Georgia" pitchFamily="34" charset="-120"/>
+              </a:rPr>
+              <a:t>Līlāvatī</a:t>
+            </a:r>
+            <a:pPr algn="l" indent="0" marL="0">
+              <a:lnSpc>
+                <a:spcPts val="1620"/>
+              </a:lnSpc>
+              <a:spcAft>
+                <a:spcPts val="300"/>
+              </a:spcAft>
+              <a:buNone/>
+            </a:pPr>
+            <a:r>
+              <a:rPr lang="en-US" sz="1200" dirty="0">
+                <a:solidFill>
+                  <a:srgbClr val="1A1A1A"/>
+                </a:solidFill>
+                <a:latin typeface="Georgia" pitchFamily="34" charset="0"/>
+                <a:ea typeface="Georgia" pitchFamily="34" charset="-122"/>
+                <a:cs typeface="Georgia" pitchFamily="34" charset="-120"/>
+              </a:rPr>
+              <a:t> word problem (e.g. the swan problem).</a:t>
+            </a:r>
+            <a:endParaRPr lang="en-US" sz="1200" dirty="0"/>
+          </a:p>
+        </p:txBody>
+      </p:sp>
+      <p:sp>
+        <p:nvSpPr>
+          <p:cNvPr id="6" name="Text 4"/>
           <p:cNvSpPr/>
           <p:nvPr/>
         </p:nvSpPr>
@@ -4229,7 +5001,7 @@
                 <a:ea typeface="Times New Roman" pitchFamily="34" charset="-122"/>
                 <a:cs typeface="Times New Roman" pitchFamily="34" charset="-120"/>
               </a:rPr>
-              <a:t>Differentiation</a:t>
+              <a:t>Core (25 min) (cont.)</a:t>
             </a:r>
             <a:endParaRPr lang="en-US" sz="1800" dirty="0"/>
           </a:p>
@@ -4244,7 +5016,7 @@
         <p:spPr>
           <a:xfrm>
             <a:off x="634901" y="883593"/>
-            <a:ext cx="8102798" cy="525661"/>
+            <a:ext cx="8102798" cy="281880"/>
           </a:xfrm>
           <a:prstGeom prst="rect">
             <a:avLst/>
@@ -4275,7 +5047,7 @@
                 <a:ea typeface="Georgia" pitchFamily="34" charset="-122"/>
                 <a:cs typeface="Georgia" pitchFamily="34" charset="-120"/>
               </a:rPr>
-              <a:t>Tier up:</a:t>
+              <a:t>Mādhava of Saṅgamagrāma (~1340–1425 CE).</a:t>
             </a:r>
             <a:pPr algn="l" indent="0" marL="0">
               <a:lnSpc>
@@ -4295,10 +5067,32 @@
                 <a:ea typeface="Georgia" pitchFamily="34" charset="-122"/>
                 <a:cs typeface="Georgia" pitchFamily="34" charset="-120"/>
               </a:rPr>
-              <a:t> Compute Mādhava's series numerically for 100 terms. How close to π?</a:t>
+              <a:t> Kerala school of mathematics.</a:t>
             </a:r>
             <a:endParaRPr lang="en-US" sz="1200" dirty="0"/>
           </a:p>
+        </p:txBody>
+      </p:sp>
+      <p:sp>
+        <p:nvSpPr>
+          <p:cNvPr id="5" name="Text 3"/>
+          <p:cNvSpPr/>
+          <p:nvPr/>
+        </p:nvSpPr>
+        <p:spPr>
+          <a:xfrm>
+            <a:off x="634901" y="1266974"/>
+            <a:ext cx="8102798" cy="1218902"/>
+          </a:xfrm>
+          <a:prstGeom prst="rect">
+            <a:avLst/>
+          </a:prstGeom>
+          <a:noFill/>
+          <a:ln/>
+        </p:spPr>
+        <p:txBody>
+          <a:bodyPr wrap="square" lIns="0" tIns="0" rIns="0" bIns="0" rtlCol="0" anchor="t"/>
+          <a:lstStyle/>
           <a:p>
             <a:pPr algn="l" marL="342900" indent="-342900">
               <a:lnSpc>
@@ -4311,6 +5105,78 @@
               <a:buChar char="•"/>
             </a:pPr>
             <a:r>
+              <a:rPr lang="en-US" sz="1200" dirty="0">
+                <a:solidFill>
+                  <a:srgbClr val="1A1A1A"/>
+                </a:solidFill>
+                <a:latin typeface="Georgia" pitchFamily="34" charset="0"/>
+                <a:ea typeface="Georgia" pitchFamily="34" charset="-122"/>
+                <a:cs typeface="Georgia" pitchFamily="34" charset="-120"/>
+              </a:rPr>
+              <a:t>Infinite series for π: $\pi/4 = 1 - 1/3 + 1/5 - 1/7 + ...$ (now sometimes called Madhava-Leibniz series).</a:t>
+            </a:r>
+            <a:endParaRPr lang="en-US" sz="1200" dirty="0"/>
+          </a:p>
+          <a:p>
+            <a:pPr algn="l" marL="342900" indent="-342900">
+              <a:lnSpc>
+                <a:spcPts val="1620"/>
+              </a:lnSpc>
+              <a:spcAft>
+                <a:spcPts val="300"/>
+              </a:spcAft>
+              <a:buSzPct val="100000"/>
+              <a:buChar char="•"/>
+            </a:pPr>
+            <a:r>
+              <a:rPr lang="en-US" sz="1200" dirty="0">
+                <a:solidFill>
+                  <a:srgbClr val="1A1A1A"/>
+                </a:solidFill>
+                <a:latin typeface="Georgia" pitchFamily="34" charset="0"/>
+                <a:ea typeface="Georgia" pitchFamily="34" charset="-122"/>
+                <a:cs typeface="Georgia" pitchFamily="34" charset="-120"/>
+              </a:rPr>
+              <a:t>Series for sine, cosine, arctan.</a:t>
+            </a:r>
+            <a:endParaRPr lang="en-US" sz="1200" dirty="0"/>
+          </a:p>
+          <a:p>
+            <a:pPr algn="l" marL="342900" indent="-342900">
+              <a:lnSpc>
+                <a:spcPts val="1620"/>
+              </a:lnSpc>
+              <a:spcAft>
+                <a:spcPts val="300"/>
+              </a:spcAft>
+              <a:buSzPct val="100000"/>
+              <a:buChar char="•"/>
+            </a:pPr>
+            <a:r>
+              <a:rPr lang="en-US" sz="1200" dirty="0">
+                <a:solidFill>
+                  <a:srgbClr val="1A1A1A"/>
+                </a:solidFill>
+                <a:latin typeface="Georgia" pitchFamily="34" charset="0"/>
+                <a:ea typeface="Georgia" pitchFamily="34" charset="-122"/>
+                <a:cs typeface="Georgia" pitchFamily="34" charset="-120"/>
+              </a:rPr>
+              <a:t>Came very close to calculus (~250 years before Newton and Leibniz).</a:t>
+            </a:r>
+            <a:endParaRPr lang="en-US" sz="1200" dirty="0"/>
+          </a:p>
+          <a:p>
+            <a:pPr algn="l" marL="342900" indent="-342900">
+              <a:lnSpc>
+                <a:spcPts val="1620"/>
+              </a:lnSpc>
+              <a:spcAft>
+                <a:spcPts val="300"/>
+              </a:spcAft>
+              <a:buSzPct val="100000"/>
+              <a:buChar char="•"/>
+            </a:pPr>
+            <a:r>
               <a:rPr lang="en-US" sz="1200" b="1" dirty="0">
                 <a:solidFill>
                   <a:srgbClr val="1A1A1A"/>
@@ -4319,7 +5185,7 @@
                 <a:ea typeface="Georgia" pitchFamily="34" charset="-122"/>
                 <a:cs typeface="Georgia" pitchFamily="34" charset="-120"/>
               </a:rPr>
-              <a:t>Tier down:</a:t>
+              <a:t>What he did NOT do:</a:t>
             </a:r>
             <a:pPr algn="l" indent="0" marL="0">
               <a:lnSpc>
@@ -4339,7 +5205,7 @@
                 <a:ea typeface="Georgia" pitchFamily="34" charset="-122"/>
                 <a:cs typeface="Georgia" pitchFamily="34" charset="-120"/>
               </a:rPr>
-              <a:t> Focus on Bakhshali + Bhāskara names with dates.</a:t>
+              <a:t> did not develop the fundamental theorem of calculus formally; did not unify the series approach with a differential framework.</a:t>
             </a:r>
             <a:endParaRPr lang="en-US" sz="1200" dirty="0"/>
           </a:p>
@@ -4347,7 +5213,7 @@
       </p:sp>
       <p:sp>
         <p:nvSpPr>
-          <p:cNvPr id="5" name="Text 3"/>
+          <p:cNvPr id="6" name="Text 4"/>
           <p:cNvSpPr/>
           <p:nvPr/>
         </p:nvSpPr>
@@ -4497,7 +5363,7 @@
                 <a:ea typeface="Times New Roman" pitchFamily="34" charset="-122"/>
                 <a:cs typeface="Times New Roman" pitchFamily="34" charset="-120"/>
               </a:rPr>
-              <a:t>Teacher notes</a:t>
+              <a:t>Discussion (10 min)</a:t>
             </a:r>
             <a:endParaRPr lang="en-US" sz="1800" dirty="0"/>
           </a:p>
@@ -4511,8 +5377,8 @@
         </p:nvSpPr>
         <p:spPr>
           <a:xfrm>
-            <a:off x="406301" y="870942"/>
-            <a:ext cx="8498026" cy="639812"/>
+            <a:off x="634901" y="883593"/>
+            <a:ext cx="8102798" cy="1180802"/>
           </a:xfrm>
           <a:prstGeom prst="rect">
             <a:avLst/>
@@ -4524,17 +5390,39 @@
           <a:bodyPr wrap="square" lIns="0" tIns="0" rIns="0" bIns="0" rtlCol="0" anchor="t"/>
           <a:lstStyle/>
           <a:p>
-            <a:pPr algn="l" indent="0" marL="0">
-              <a:lnSpc>
-                <a:spcPts val="1680"/>
-              </a:lnSpc>
-              <a:spcBef>
-                <a:spcPts val="300"/>
-              </a:spcBef>
-              <a:spcAft>
-                <a:spcPts val="300"/>
-              </a:spcAft>
-              <a:buNone/>
+            <a:pPr algn="l" marL="342900" indent="-342900">
+              <a:lnSpc>
+                <a:spcPts val="1620"/>
+              </a:lnSpc>
+              <a:spcAft>
+                <a:spcPts val="300"/>
+              </a:spcAft>
+              <a:buSzPct val="100000"/>
+              <a:buChar char="•"/>
+            </a:pPr>
+            <a:r>
+              <a:rPr lang="en-US" sz="1200" i="1" dirty="0">
+                <a:solidFill>
+                  <a:srgbClr val="1A1A1A"/>
+                </a:solidFill>
+                <a:latin typeface="Georgia" pitchFamily="34" charset="0"/>
+                <a:ea typeface="Georgia" pitchFamily="34" charset="-122"/>
+                <a:cs typeface="Georgia" pitchFamily="34" charset="-120"/>
+              </a:rPr>
+              <a:t>"Madhava had infinite series 300 years before Leibniz. So why is the series still called 'Leibniz series' in most textbooks?"</a:t>
+            </a:r>
+            <a:endParaRPr lang="en-US" sz="1200" dirty="0"/>
+          </a:p>
+          <a:p>
+            <a:pPr algn="l" marL="342900" indent="-342900">
+              <a:lnSpc>
+                <a:spcPts val="1620"/>
+              </a:lnSpc>
+              <a:spcAft>
+                <a:spcPts val="300"/>
+              </a:spcAft>
+              <a:buSzPct val="100000"/>
+              <a:buChar char="•"/>
             </a:pPr>
             <a:r>
               <a:rPr lang="en-US" sz="1200" dirty="0">
@@ -4545,7 +5433,31 @@
                 <a:ea typeface="Georgia" pitchFamily="34" charset="-122"/>
                 <a:cs typeface="Georgia" pitchFamily="34" charset="-120"/>
               </a:rPr>
-              <a:t>– The Madhava-Leibniz attribution is one of the most pedagogically useful examples of "real Indian contribution, slow Western recognition." – Don't oversell: Mādhava's work was discovered/recognised in the West via George Joseph and others in the late 20th c.</a:t>
+              <a:t>Possible answers: European mathematical literature was the dominant pipeline; Kerala school's work was not translated to European languages until much later; cite-attribution is conservative.</a:t>
+            </a:r>
+            <a:endParaRPr lang="en-US" sz="1200" dirty="0"/>
+          </a:p>
+          <a:p>
+            <a:pPr algn="l" marL="342900" indent="-342900">
+              <a:lnSpc>
+                <a:spcPts val="1620"/>
+              </a:lnSpc>
+              <a:spcAft>
+                <a:spcPts val="300"/>
+              </a:spcAft>
+              <a:buSzPct val="100000"/>
+              <a:buChar char="•"/>
+            </a:pPr>
+            <a:r>
+              <a:rPr lang="en-US" sz="1200" dirty="0">
+                <a:solidFill>
+                  <a:srgbClr val="1A1A1A"/>
+                </a:solidFill>
+                <a:latin typeface="Georgia" pitchFamily="34" charset="0"/>
+                <a:ea typeface="Georgia" pitchFamily="34" charset="-122"/>
+                <a:cs typeface="Georgia" pitchFamily="34" charset="-120"/>
+              </a:rPr>
+              <a:t>The corrective: modern math history is increasingly using "Madhava-Leibniz series" — a real, slow correction.</a:t>
             </a:r>
             <a:endParaRPr lang="en-US" sz="1200" dirty="0"/>
           </a:p>
